--- a/marketingmcdonalds.pptx
+++ b/marketingmcdonalds.pptx
@@ -106,6 +106,11 @@
       </a:defRPr>
     </a:lvl9pPr>
   </p:defaultTextStyle>
+  <p:extLst>
+    <p:ext uri="{EFAFB233-063F-42B5-8137-9DF3F51BA10A}">
+      <p15:sldGuideLst xmlns:p15="http://schemas.microsoft.com/office/powerpoint/2012/main"/>
+    </p:ext>
+  </p:extLst>
 </p:presentation>
 </file>
 
@@ -240,7 +245,7 @@
           <a:p>
             <a:fld id="{A7F53F4B-3B81-4AE6-B8AF-E0F9EB511A9E}" type="datetimeFigureOut">
               <a:rPr lang="pt-BR" smtClean="0"/>
-              <a:t>24/08/2026</a:t>
+              <a:t>27/08/2026</a:t>
             </a:fld>
             <a:endParaRPr lang="pt-BR"/>
           </a:p>
@@ -410,7 +415,7 @@
           <a:p>
             <a:fld id="{A7F53F4B-3B81-4AE6-B8AF-E0F9EB511A9E}" type="datetimeFigureOut">
               <a:rPr lang="pt-BR" smtClean="0"/>
-              <a:t>24/08/2026</a:t>
+              <a:t>27/08/2026</a:t>
             </a:fld>
             <a:endParaRPr lang="pt-BR"/>
           </a:p>
@@ -590,7 +595,7 @@
           <a:p>
             <a:fld id="{A7F53F4B-3B81-4AE6-B8AF-E0F9EB511A9E}" type="datetimeFigureOut">
               <a:rPr lang="pt-BR" smtClean="0"/>
-              <a:t>24/08/2026</a:t>
+              <a:t>27/08/2026</a:t>
             </a:fld>
             <a:endParaRPr lang="pt-BR"/>
           </a:p>
@@ -760,7 +765,7 @@
           <a:p>
             <a:fld id="{A7F53F4B-3B81-4AE6-B8AF-E0F9EB511A9E}" type="datetimeFigureOut">
               <a:rPr lang="pt-BR" smtClean="0"/>
-              <a:t>24/08/2026</a:t>
+              <a:t>27/08/2026</a:t>
             </a:fld>
             <a:endParaRPr lang="pt-BR"/>
           </a:p>
@@ -1006,7 +1011,7 @@
           <a:p>
             <a:fld id="{A7F53F4B-3B81-4AE6-B8AF-E0F9EB511A9E}" type="datetimeFigureOut">
               <a:rPr lang="pt-BR" smtClean="0"/>
-              <a:t>24/08/2026</a:t>
+              <a:t>27/08/2026</a:t>
             </a:fld>
             <a:endParaRPr lang="pt-BR"/>
           </a:p>
@@ -1238,7 +1243,7 @@
           <a:p>
             <a:fld id="{A7F53F4B-3B81-4AE6-B8AF-E0F9EB511A9E}" type="datetimeFigureOut">
               <a:rPr lang="pt-BR" smtClean="0"/>
-              <a:t>24/08/2026</a:t>
+              <a:t>27/08/2026</a:t>
             </a:fld>
             <a:endParaRPr lang="pt-BR"/>
           </a:p>
@@ -1605,7 +1610,7 @@
           <a:p>
             <a:fld id="{A7F53F4B-3B81-4AE6-B8AF-E0F9EB511A9E}" type="datetimeFigureOut">
               <a:rPr lang="pt-BR" smtClean="0"/>
-              <a:t>24/08/2026</a:t>
+              <a:t>27/08/2026</a:t>
             </a:fld>
             <a:endParaRPr lang="pt-BR"/>
           </a:p>
@@ -1723,7 +1728,7 @@
           <a:p>
             <a:fld id="{A7F53F4B-3B81-4AE6-B8AF-E0F9EB511A9E}" type="datetimeFigureOut">
               <a:rPr lang="pt-BR" smtClean="0"/>
-              <a:t>24/08/2026</a:t>
+              <a:t>27/08/2026</a:t>
             </a:fld>
             <a:endParaRPr lang="pt-BR"/>
           </a:p>
@@ -1818,7 +1823,7 @@
           <a:p>
             <a:fld id="{A7F53F4B-3B81-4AE6-B8AF-E0F9EB511A9E}" type="datetimeFigureOut">
               <a:rPr lang="pt-BR" smtClean="0"/>
-              <a:t>24/08/2026</a:t>
+              <a:t>27/08/2026</a:t>
             </a:fld>
             <a:endParaRPr lang="pt-BR"/>
           </a:p>
@@ -2095,7 +2100,7 @@
           <a:p>
             <a:fld id="{A7F53F4B-3B81-4AE6-B8AF-E0F9EB511A9E}" type="datetimeFigureOut">
               <a:rPr lang="pt-BR" smtClean="0"/>
-              <a:t>24/08/2026</a:t>
+              <a:t>27/08/2026</a:t>
             </a:fld>
             <a:endParaRPr lang="pt-BR"/>
           </a:p>
@@ -2352,7 +2357,7 @@
           <a:p>
             <a:fld id="{A7F53F4B-3B81-4AE6-B8AF-E0F9EB511A9E}" type="datetimeFigureOut">
               <a:rPr lang="pt-BR" smtClean="0"/>
-              <a:t>24/08/2026</a:t>
+              <a:t>27/08/2026</a:t>
             </a:fld>
             <a:endParaRPr lang="pt-BR"/>
           </a:p>
@@ -2565,7 +2570,7 @@
           <a:p>
             <a:fld id="{A7F53F4B-3B81-4AE6-B8AF-E0F9EB511A9E}" type="datetimeFigureOut">
               <a:rPr lang="pt-BR" smtClean="0"/>
-              <a:t>24/08/2026</a:t>
+              <a:t>27/08/2026</a:t>
             </a:fld>
             <a:endParaRPr lang="pt-BR"/>
           </a:p>
@@ -3102,110 +3107,36 @@
           </a:p>
         </p:txBody>
       </p:sp>
-      <p:sp>
-        <p:nvSpPr>
-          <p:cNvPr id="5" name="CaixaDeTexto 4">
+      <p:pic>
+        <p:nvPicPr>
+          <p:cNvPr id="20" name="Imagem 19" descr="mcdonald's transparente png, mcdonald's livre png 19909454 PNG">
             <a:extLst>
               <a:ext uri="{FF2B5EF4-FFF2-40B4-BE49-F238E27FC236}">
-                <a16:creationId xmlns:a16="http://schemas.microsoft.com/office/drawing/2014/main" id="{08970CC3-8EF5-417C-D12B-A66B4A31A5D0}"/>
+                <a16:creationId xmlns:a16="http://schemas.microsoft.com/office/drawing/2014/main" id="{45D84C84-201F-B664-FB8E-B548D4A364E4}"/>
               </a:ext>
             </a:extLst>
           </p:cNvPr>
-          <p:cNvSpPr txBox="1"/>
+          <p:cNvPicPr>
+            <a:picLocks noChangeAspect="1"/>
+          </p:cNvPicPr>
           <p:nvPr/>
-        </p:nvSpPr>
+        </p:nvPicPr>
+        <p:blipFill>
+          <a:blip r:embed="rId2"/>
+          <a:stretch>
+            <a:fillRect/>
+          </a:stretch>
+        </p:blipFill>
         <p:spPr>
           <a:xfrm>
-            <a:off x="2569076" y="72836"/>
-            <a:ext cx="752475" cy="307777"/>
+            <a:off x="6765767" y="0"/>
+            <a:ext cx="422673" cy="422673"/>
           </a:xfrm>
           <a:prstGeom prst="rect">
             <a:avLst/>
           </a:prstGeom>
-          <a:noFill/>
         </p:spPr>
-        <p:txBody>
-          <a:bodyPr wrap="square" rtlCol="0">
-            <a:spAutoFit/>
-          </a:bodyPr>
-          <a:lstStyle/>
-          <a:p>
-            <a:r>
-              <a:rPr lang="pt-BR" sz="1400" b="1" dirty="0">
-                <a:solidFill>
-                  <a:schemeClr val="bg1"/>
-                </a:solidFill>
-                <a:effectLst>
-                  <a:reflection blurRad="6350" stA="55000" endA="300" endPos="45500" dir="5400000" sy="-100000" algn="bl" rotWithShape="0"/>
-                </a:effectLst>
-                <a:latin typeface="Arial Rounded MT Bold" panose="020F0704030504030204" pitchFamily="34" charset="0"/>
-              </a:rPr>
-              <a:t>Pediu</a:t>
-            </a:r>
-            <a:endParaRPr lang="pt-BR" sz="2000" b="1" dirty="0">
-              <a:solidFill>
-                <a:schemeClr val="bg1"/>
-              </a:solidFill>
-              <a:effectLst>
-                <a:reflection blurRad="6350" stA="55000" endA="300" endPos="45500" dir="5400000" sy="-100000" algn="bl" rotWithShape="0"/>
-              </a:effectLst>
-              <a:latin typeface="Arial Rounded MT Bold" panose="020F0704030504030204" pitchFamily="34" charset="0"/>
-            </a:endParaRPr>
-          </a:p>
-        </p:txBody>
-      </p:sp>
-      <p:sp>
-        <p:nvSpPr>
-          <p:cNvPr id="6" name="CaixaDeTexto 5">
-            <a:extLst>
-              <a:ext uri="{FF2B5EF4-FFF2-40B4-BE49-F238E27FC236}">
-                <a16:creationId xmlns:a16="http://schemas.microsoft.com/office/drawing/2014/main" id="{B137987D-9597-C10F-80D8-EAAC520061A2}"/>
-              </a:ext>
-            </a:extLst>
-          </p:cNvPr>
-          <p:cNvSpPr txBox="1"/>
-          <p:nvPr/>
-        </p:nvSpPr>
-        <p:spPr>
-          <a:xfrm>
-            <a:off x="2772496" y="261748"/>
-            <a:ext cx="1391373" cy="338554"/>
-          </a:xfrm>
-          <a:prstGeom prst="rect">
-            <a:avLst/>
-          </a:prstGeom>
-          <a:noFill/>
-        </p:spPr>
-        <p:txBody>
-          <a:bodyPr wrap="square" rtlCol="0">
-            <a:spAutoFit/>
-          </a:bodyPr>
-          <a:lstStyle/>
-          <a:p>
-            <a:r>
-              <a:rPr lang="pt-BR" sz="1600" dirty="0">
-                <a:solidFill>
-                  <a:schemeClr val="bg1"/>
-                </a:solidFill>
-                <a:effectLst>
-                  <a:reflection blurRad="6350" stA="55000" endA="300" endPos="45500" dir="5400000" sy="-100000" algn="bl" rotWithShape="0"/>
-                </a:effectLst>
-                <a:latin typeface="Arial Rounded MT Bold" panose="020F0704030504030204" pitchFamily="34" charset="0"/>
-              </a:rPr>
-              <a:t>Cantando</a:t>
-            </a:r>
-            <a:endParaRPr lang="pt-BR" dirty="0">
-              <a:solidFill>
-                <a:schemeClr val="bg1"/>
-              </a:solidFill>
-              <a:effectLst>
-                <a:reflection blurRad="6350" stA="55000" endA="300" endPos="45500" dir="5400000" sy="-100000" algn="bl" rotWithShape="0"/>
-              </a:effectLst>
-              <a:latin typeface="Arial Rounded MT Bold" panose="020F0704030504030204" pitchFamily="34" charset="0"/>
-            </a:endParaRPr>
-          </a:p>
-        </p:txBody>
-      </p:sp>
+      </p:pic>
       <p:pic>
         <p:nvPicPr>
           <p:cNvPr id="18" name="Imagem 17">
@@ -3221,7 +3152,7 @@
           <p:nvPr/>
         </p:nvPicPr>
         <p:blipFill>
-          <a:blip r:embed="rId2">
+          <a:blip r:embed="rId3">
             <a:extLst>
               <a:ext uri="{28A0092B-C50C-407E-A947-70E740481C1C}">
                 <a14:useLocalDpi xmlns:a14="http://schemas.microsoft.com/office/drawing/2010/main" val="0"/>
@@ -3234,74 +3165,75 @@
         </p:blipFill>
         <p:spPr>
           <a:xfrm>
-            <a:off x="530831" y="100280"/>
-            <a:ext cx="1296040" cy="1230802"/>
+            <a:off x="631031" y="109004"/>
+            <a:ext cx="1286617" cy="1221853"/>
           </a:xfrm>
           <a:prstGeom prst="rect">
             <a:avLst/>
           </a:prstGeom>
         </p:spPr>
       </p:pic>
-      <p:pic>
-        <p:nvPicPr>
-          <p:cNvPr id="20" name="Imagem 19" descr="mcdonald's transparente png, mcdonald's livre png 19909454 PNG">
+      <p:grpSp>
+        <p:nvGrpSpPr>
+          <p:cNvPr id="13" name="Agrupar 12">
             <a:extLst>
               <a:ext uri="{FF2B5EF4-FFF2-40B4-BE49-F238E27FC236}">
-                <a16:creationId xmlns:a16="http://schemas.microsoft.com/office/drawing/2014/main" id="{45D84C84-201F-B664-FB8E-B548D4A364E4}"/>
+                <a16:creationId xmlns:a16="http://schemas.microsoft.com/office/drawing/2014/main" id="{326EFA0F-DEF2-0B47-FF5A-EFBCBC02AADB}"/>
               </a:ext>
             </a:extLst>
           </p:cNvPr>
-          <p:cNvPicPr>
-            <a:picLocks noChangeAspect="1"/>
-          </p:cNvPicPr>
+          <p:cNvGrpSpPr/>
           <p:nvPr/>
-        </p:nvPicPr>
-        <p:blipFill>
-          <a:blip r:embed="rId3"/>
-          <a:stretch>
-            <a:fillRect/>
-          </a:stretch>
-        </p:blipFill>
-        <p:spPr>
+        </p:nvGrpSpPr>
+        <p:grpSpPr>
           <a:xfrm>
-            <a:off x="6765767" y="0"/>
-            <a:ext cx="422673" cy="422673"/>
+            <a:off x="2782933" y="39640"/>
+            <a:ext cx="1931486" cy="1285048"/>
+            <a:chOff x="2569076" y="72836"/>
+            <a:chExt cx="1931486" cy="1285048"/>
           </a:xfrm>
-          <a:prstGeom prst="rect">
-            <a:avLst/>
-          </a:prstGeom>
-        </p:spPr>
-      </p:pic>
-      <p:sp>
-        <p:nvSpPr>
-          <p:cNvPr id="22" name="CaixaDeTexto 21">
-            <a:extLst>
-              <a:ext uri="{FF2B5EF4-FFF2-40B4-BE49-F238E27FC236}">
-                <a16:creationId xmlns:a16="http://schemas.microsoft.com/office/drawing/2014/main" id="{341EDF24-1B4E-FA16-C001-DCBF00D11B01}"/>
-              </a:ext>
-            </a:extLst>
-          </p:cNvPr>
-          <p:cNvSpPr txBox="1"/>
-          <p:nvPr/>
-        </p:nvSpPr>
-        <p:spPr>
-          <a:xfrm>
-            <a:off x="2603705" y="466690"/>
-            <a:ext cx="738188" cy="338554"/>
-          </a:xfrm>
-          <a:prstGeom prst="rect">
-            <a:avLst/>
-          </a:prstGeom>
-          <a:noFill/>
-        </p:spPr>
-        <p:txBody>
-          <a:bodyPr wrap="square" rtlCol="0">
-            <a:spAutoFit/>
-          </a:bodyPr>
-          <a:lstStyle/>
-          <a:p>
-            <a:r>
-              <a:rPr lang="pt-BR" sz="1600" dirty="0">
+        </p:grpSpPr>
+        <p:sp>
+          <p:nvSpPr>
+            <p:cNvPr id="14" name="CaixaDeTexto 13">
+              <a:extLst>
+                <a:ext uri="{FF2B5EF4-FFF2-40B4-BE49-F238E27FC236}">
+                  <a16:creationId xmlns:a16="http://schemas.microsoft.com/office/drawing/2014/main" id="{6DF92B17-2F69-E38F-5B58-DF589707C28A}"/>
+                </a:ext>
+              </a:extLst>
+            </p:cNvPr>
+            <p:cNvSpPr txBox="1"/>
+            <p:nvPr/>
+          </p:nvSpPr>
+          <p:spPr>
+            <a:xfrm>
+              <a:off x="2569076" y="72836"/>
+              <a:ext cx="752475" cy="307777"/>
+            </a:xfrm>
+            <a:prstGeom prst="rect">
+              <a:avLst/>
+            </a:prstGeom>
+            <a:noFill/>
+          </p:spPr>
+          <p:txBody>
+            <a:bodyPr wrap="square" rtlCol="0">
+              <a:spAutoFit/>
+            </a:bodyPr>
+            <a:lstStyle/>
+            <a:p>
+              <a:r>
+                <a:rPr lang="pt-BR" sz="1400" b="1" dirty="0">
+                  <a:solidFill>
+                    <a:schemeClr val="bg1"/>
+                  </a:solidFill>
+                  <a:effectLst>
+                    <a:reflection blurRad="6350" stA="55000" endA="300" endPos="45500" dir="5400000" sy="-100000" algn="bl" rotWithShape="0"/>
+                  </a:effectLst>
+                  <a:latin typeface="Arial Rounded MT Bold" panose="020F0704030504030204" pitchFamily="34" charset="0"/>
+                </a:rPr>
+                <a:t>Pediu</a:t>
+              </a:r>
+              <a:endParaRPr lang="pt-BR" sz="2000" b="1" dirty="0">
                 <a:solidFill>
                   <a:schemeClr val="bg1"/>
                 </a:solidFill>
@@ -3309,42 +3241,51 @@
                   <a:reflection blurRad="6350" stA="55000" endA="300" endPos="45500" dir="5400000" sy="-100000" algn="bl" rotWithShape="0"/>
                 </a:effectLst>
                 <a:latin typeface="Arial Rounded MT Bold" panose="020F0704030504030204" pitchFamily="34" charset="0"/>
-              </a:rPr>
-              <a:t>Saiu</a:t>
-            </a:r>
-          </a:p>
-        </p:txBody>
-      </p:sp>
-      <p:sp>
-        <p:nvSpPr>
-          <p:cNvPr id="23" name="CaixaDeTexto 22">
-            <a:extLst>
-              <a:ext uri="{FF2B5EF4-FFF2-40B4-BE49-F238E27FC236}">
-                <a16:creationId xmlns:a16="http://schemas.microsoft.com/office/drawing/2014/main" id="{B12B5276-AC5C-C33E-ADE0-EDA9D5808A52}"/>
-              </a:ext>
-            </a:extLst>
-          </p:cNvPr>
-          <p:cNvSpPr txBox="1"/>
-          <p:nvPr/>
-        </p:nvSpPr>
-        <p:spPr>
-          <a:xfrm>
-            <a:off x="2794288" y="683600"/>
-            <a:ext cx="1347787" cy="338554"/>
-          </a:xfrm>
-          <a:prstGeom prst="rect">
-            <a:avLst/>
-          </a:prstGeom>
-          <a:noFill/>
-        </p:spPr>
-        <p:txBody>
-          <a:bodyPr wrap="square" rtlCol="0">
-            <a:spAutoFit/>
-          </a:bodyPr>
-          <a:lstStyle/>
-          <a:p>
-            <a:r>
-              <a:rPr lang="pt-BR" sz="1600" dirty="0">
+              </a:endParaRPr>
+            </a:p>
+          </p:txBody>
+        </p:sp>
+        <p:sp>
+          <p:nvSpPr>
+            <p:cNvPr id="15" name="CaixaDeTexto 14">
+              <a:extLst>
+                <a:ext uri="{FF2B5EF4-FFF2-40B4-BE49-F238E27FC236}">
+                  <a16:creationId xmlns:a16="http://schemas.microsoft.com/office/drawing/2014/main" id="{0ED70FB7-E3E5-6C9C-9B60-8FDC7FDD6996}"/>
+                </a:ext>
+              </a:extLst>
+            </p:cNvPr>
+            <p:cNvSpPr txBox="1"/>
+            <p:nvPr/>
+          </p:nvSpPr>
+          <p:spPr>
+            <a:xfrm>
+              <a:off x="2772496" y="261748"/>
+              <a:ext cx="1391373" cy="338554"/>
+            </a:xfrm>
+            <a:prstGeom prst="rect">
+              <a:avLst/>
+            </a:prstGeom>
+            <a:noFill/>
+          </p:spPr>
+          <p:txBody>
+            <a:bodyPr wrap="square" rtlCol="0">
+              <a:spAutoFit/>
+            </a:bodyPr>
+            <a:lstStyle/>
+            <a:p>
+              <a:r>
+                <a:rPr lang="pt-BR" sz="1600" dirty="0">
+                  <a:solidFill>
+                    <a:schemeClr val="bg1"/>
+                  </a:solidFill>
+                  <a:effectLst>
+                    <a:reflection blurRad="6350" stA="55000" endA="300" endPos="45500" dir="5400000" sy="-100000" algn="bl" rotWithShape="0"/>
+                  </a:effectLst>
+                  <a:latin typeface="Arial Rounded MT Bold" panose="020F0704030504030204" pitchFamily="34" charset="0"/>
+                </a:rPr>
+                <a:t>Cantando</a:t>
+              </a:r>
+              <a:endParaRPr lang="pt-BR" dirty="0">
                 <a:solidFill>
                   <a:schemeClr val="bg1"/>
                 </a:solidFill>
@@ -3352,67 +3293,152 @@
                   <a:reflection blurRad="6350" stA="55000" endA="300" endPos="45500" dir="5400000" sy="-100000" algn="bl" rotWithShape="0"/>
                 </a:effectLst>
                 <a:latin typeface="Arial Rounded MT Bold" panose="020F0704030504030204" pitchFamily="34" charset="0"/>
-              </a:rPr>
-              <a:t>Ganhando</a:t>
-            </a:r>
-            <a:endParaRPr lang="pt-BR" dirty="0">
-              <a:solidFill>
-                <a:schemeClr val="bg1"/>
-              </a:solidFill>
-              <a:effectLst>
-                <a:reflection blurRad="6350" stA="55000" endA="300" endPos="45500" dir="5400000" sy="-100000" algn="bl" rotWithShape="0"/>
-              </a:effectLst>
-              <a:latin typeface="Arial Rounded MT Bold" panose="020F0704030504030204" pitchFamily="34" charset="0"/>
-            </a:endParaRPr>
-          </a:p>
-        </p:txBody>
-      </p:sp>
-      <p:sp>
-        <p:nvSpPr>
-          <p:cNvPr id="28" name="CaixaDeTexto 27">
-            <a:extLst>
-              <a:ext uri="{FF2B5EF4-FFF2-40B4-BE49-F238E27FC236}">
-                <a16:creationId xmlns:a16="http://schemas.microsoft.com/office/drawing/2014/main" id="{54B11A14-A269-8BA7-69D2-42D101395F80}"/>
-              </a:ext>
-            </a:extLst>
-          </p:cNvPr>
-          <p:cNvSpPr txBox="1"/>
-          <p:nvPr/>
-        </p:nvSpPr>
-        <p:spPr>
-          <a:xfrm>
-            <a:off x="2647949" y="988552"/>
-            <a:ext cx="1852613" cy="369332"/>
-          </a:xfrm>
-          <a:prstGeom prst="rect">
-            <a:avLst/>
-          </a:prstGeom>
-          <a:noFill/>
-        </p:spPr>
-        <p:txBody>
-          <a:bodyPr wrap="square" rtlCol="0">
-            <a:spAutoFit/>
-          </a:bodyPr>
-          <a:lstStyle/>
-          <a:p>
-            <a:r>
-              <a:rPr lang="pt-BR" dirty="0">
+              </a:endParaRPr>
+            </a:p>
+          </p:txBody>
+        </p:sp>
+        <p:sp>
+          <p:nvSpPr>
+            <p:cNvPr id="16" name="CaixaDeTexto 15">
+              <a:extLst>
+                <a:ext uri="{FF2B5EF4-FFF2-40B4-BE49-F238E27FC236}">
+                  <a16:creationId xmlns:a16="http://schemas.microsoft.com/office/drawing/2014/main" id="{2DFB1CAA-8966-ED0E-6757-F82BD2460125}"/>
+                </a:ext>
+              </a:extLst>
+            </p:cNvPr>
+            <p:cNvSpPr txBox="1"/>
+            <p:nvPr/>
+          </p:nvSpPr>
+          <p:spPr>
+            <a:xfrm>
+              <a:off x="2603705" y="466690"/>
+              <a:ext cx="738188" cy="338554"/>
+            </a:xfrm>
+            <a:prstGeom prst="rect">
+              <a:avLst/>
+            </a:prstGeom>
+            <a:noFill/>
+          </p:spPr>
+          <p:txBody>
+            <a:bodyPr wrap="square" rtlCol="0">
+              <a:spAutoFit/>
+            </a:bodyPr>
+            <a:lstStyle/>
+            <a:p>
+              <a:r>
+                <a:rPr lang="pt-BR" sz="1600" dirty="0">
+                  <a:solidFill>
+                    <a:schemeClr val="bg1"/>
+                  </a:solidFill>
+                  <a:effectLst>
+                    <a:reflection blurRad="6350" stA="55000" endA="300" endPos="45500" dir="5400000" sy="-100000" algn="bl" rotWithShape="0"/>
+                  </a:effectLst>
+                  <a:latin typeface="Arial Rounded MT Bold" panose="020F0704030504030204" pitchFamily="34" charset="0"/>
+                </a:rPr>
+                <a:t>Saiu</a:t>
+              </a:r>
+            </a:p>
+          </p:txBody>
+        </p:sp>
+        <p:sp>
+          <p:nvSpPr>
+            <p:cNvPr id="17" name="CaixaDeTexto 16">
+              <a:extLst>
+                <a:ext uri="{FF2B5EF4-FFF2-40B4-BE49-F238E27FC236}">
+                  <a16:creationId xmlns:a16="http://schemas.microsoft.com/office/drawing/2014/main" id="{D80BC60F-7DE6-C3FE-685C-F93F86AC62F7}"/>
+                </a:ext>
+              </a:extLst>
+            </p:cNvPr>
+            <p:cNvSpPr txBox="1"/>
+            <p:nvPr/>
+          </p:nvSpPr>
+          <p:spPr>
+            <a:xfrm>
+              <a:off x="2794288" y="683600"/>
+              <a:ext cx="1347787" cy="338554"/>
+            </a:xfrm>
+            <a:prstGeom prst="rect">
+              <a:avLst/>
+            </a:prstGeom>
+            <a:noFill/>
+          </p:spPr>
+          <p:txBody>
+            <a:bodyPr wrap="square" rtlCol="0">
+              <a:spAutoFit/>
+            </a:bodyPr>
+            <a:lstStyle/>
+            <a:p>
+              <a:r>
+                <a:rPr lang="pt-BR" sz="1600" dirty="0">
+                  <a:solidFill>
+                    <a:schemeClr val="bg1"/>
+                  </a:solidFill>
+                  <a:effectLst>
+                    <a:reflection blurRad="6350" stA="55000" endA="300" endPos="45500" dir="5400000" sy="-100000" algn="bl" rotWithShape="0"/>
+                  </a:effectLst>
+                  <a:latin typeface="Arial Rounded MT Bold" panose="020F0704030504030204" pitchFamily="34" charset="0"/>
+                </a:rPr>
+                <a:t>Ganhando</a:t>
+              </a:r>
+              <a:endParaRPr lang="pt-BR" dirty="0">
                 <a:solidFill>
                   <a:schemeClr val="bg1"/>
                 </a:solidFill>
+                <a:effectLst>
+                  <a:reflection blurRad="6350" stA="55000" endA="300" endPos="45500" dir="5400000" sy="-100000" algn="bl" rotWithShape="0"/>
+                </a:effectLst>
                 <a:latin typeface="Arial Rounded MT Bold" panose="020F0704030504030204" pitchFamily="34" charset="0"/>
-              </a:rPr>
-              <a:t>No drive-tudo</a:t>
-            </a:r>
-          </a:p>
-        </p:txBody>
-      </p:sp>
+              </a:endParaRPr>
+            </a:p>
+          </p:txBody>
+        </p:sp>
+        <p:sp>
+          <p:nvSpPr>
+            <p:cNvPr id="19" name="CaixaDeTexto 18">
+              <a:extLst>
+                <a:ext uri="{FF2B5EF4-FFF2-40B4-BE49-F238E27FC236}">
+                  <a16:creationId xmlns:a16="http://schemas.microsoft.com/office/drawing/2014/main" id="{1A072455-3ACB-5CA2-FF18-D246F5641C97}"/>
+                </a:ext>
+              </a:extLst>
+            </p:cNvPr>
+            <p:cNvSpPr txBox="1"/>
+            <p:nvPr/>
+          </p:nvSpPr>
+          <p:spPr>
+            <a:xfrm>
+              <a:off x="2647949" y="988552"/>
+              <a:ext cx="1852613" cy="369332"/>
+            </a:xfrm>
+            <a:prstGeom prst="rect">
+              <a:avLst/>
+            </a:prstGeom>
+            <a:noFill/>
+          </p:spPr>
+          <p:txBody>
+            <a:bodyPr wrap="square" rtlCol="0">
+              <a:spAutoFit/>
+            </a:bodyPr>
+            <a:lstStyle/>
+            <a:p>
+              <a:r>
+                <a:rPr lang="pt-BR" dirty="0">
+                  <a:solidFill>
+                    <a:schemeClr val="bg1"/>
+                  </a:solidFill>
+                  <a:latin typeface="Arial Rounded MT Bold" panose="020F0704030504030204" pitchFamily="34" charset="0"/>
+                </a:rPr>
+                <a:t>No drive-tudo</a:t>
+              </a:r>
+            </a:p>
+          </p:txBody>
+        </p:sp>
+      </p:grpSp>
       <p:pic>
         <p:nvPicPr>
-          <p:cNvPr id="30" name="Imagem 29">
+          <p:cNvPr id="24" name="Imagem 23">
             <a:extLst>
               <a:ext uri="{FF2B5EF4-FFF2-40B4-BE49-F238E27FC236}">
-                <a16:creationId xmlns:a16="http://schemas.microsoft.com/office/drawing/2014/main" id="{0FC8E154-B293-15EB-8215-CE70B002CF68}"/>
+                <a16:creationId xmlns:a16="http://schemas.microsoft.com/office/drawing/2014/main" id="{4B697B11-179F-63F1-91CA-D5263A400F35}"/>
               </a:ext>
             </a:extLst>
           </p:cNvPr>
@@ -3429,14 +3455,15 @@
               </a:ext>
             </a:extLst>
           </a:blip>
+          <a:srcRect b="6451"/>
           <a:stretch>
             <a:fillRect/>
           </a:stretch>
         </p:blipFill>
         <p:spPr>
           <a:xfrm>
-            <a:off x="4848862" y="39639"/>
-            <a:ext cx="1164566" cy="1360582"/>
+            <a:off x="4913652" y="0"/>
+            <a:ext cx="1317408" cy="1439863"/>
           </a:xfrm>
           <a:prstGeom prst="rect">
             <a:avLst/>
@@ -3453,6 +3480,1601 @@
   <p:clrMapOvr>
     <a:masterClrMapping/>
   </p:clrMapOvr>
+  <p:timing>
+    <p:tnLst>
+      <p:par>
+        <p:cTn id="1" dur="indefinite" restart="never" nodeType="tmRoot">
+          <p:childTnLst>
+            <p:seq concurrent="1" nextAc="seek">
+              <p:cTn id="2" dur="indefinite" nodeType="mainSeq">
+                <p:childTnLst>
+                  <p:par>
+                    <p:cTn id="3" fill="hold">
+                      <p:stCondLst>
+                        <p:cond delay="indefinite"/>
+                      </p:stCondLst>
+                      <p:childTnLst>
+                        <p:par>
+                          <p:cTn id="4" fill="hold">
+                            <p:stCondLst>
+                              <p:cond delay="0"/>
+                            </p:stCondLst>
+                            <p:childTnLst>
+                              <p:par>
+                                <p:cTn id="5" presetID="26" presetClass="entr" presetSubtype="0" fill="hold" nodeType="clickEffect">
+                                  <p:stCondLst>
+                                    <p:cond delay="0"/>
+                                  </p:stCondLst>
+                                  <p:childTnLst>
+                                    <p:set>
+                                      <p:cBhvr>
+                                        <p:cTn id="6" dur="1" fill="hold">
+                                          <p:stCondLst>
+                                            <p:cond delay="0"/>
+                                          </p:stCondLst>
+                                        </p:cTn>
+                                        <p:tgtEl>
+                                          <p:spTgt spid="18"/>
+                                        </p:tgtEl>
+                                        <p:attrNameLst>
+                                          <p:attrName>style.visibility</p:attrName>
+                                        </p:attrNameLst>
+                                      </p:cBhvr>
+                                      <p:to>
+                                        <p:strVal val="visible"/>
+                                      </p:to>
+                                    </p:set>
+                                    <p:animEffect transition="in" filter="wipe(down)">
+                                      <p:cBhvr>
+                                        <p:cTn id="7" dur="363">
+                                          <p:stCondLst>
+                                            <p:cond delay="0"/>
+                                          </p:stCondLst>
+                                        </p:cTn>
+                                        <p:tgtEl>
+                                          <p:spTgt spid="18"/>
+                                        </p:tgtEl>
+                                      </p:cBhvr>
+                                    </p:animEffect>
+                                    <p:anim calcmode="lin" valueType="num">
+                                      <p:cBhvr>
+                                        <p:cTn id="8" dur="1139" tmFilter="0,0; 0.14,0.36; 0.43,0.73; 0.71,0.91; 1.0,1.0">
+                                          <p:stCondLst>
+                                            <p:cond delay="0"/>
+                                          </p:stCondLst>
+                                        </p:cTn>
+                                        <p:tgtEl>
+                                          <p:spTgt spid="18"/>
+                                        </p:tgtEl>
+                                        <p:attrNameLst>
+                                          <p:attrName>ppt_x</p:attrName>
+                                        </p:attrNameLst>
+                                      </p:cBhvr>
+                                      <p:tavLst>
+                                        <p:tav tm="0">
+                                          <p:val>
+                                            <p:strVal val="#ppt_x-0.25"/>
+                                          </p:val>
+                                        </p:tav>
+                                        <p:tav tm="100000">
+                                          <p:val>
+                                            <p:strVal val="#ppt_x"/>
+                                          </p:val>
+                                        </p:tav>
+                                      </p:tavLst>
+                                    </p:anim>
+                                    <p:anim calcmode="lin" valueType="num">
+                                      <p:cBhvr>
+                                        <p:cTn id="9" dur="415" tmFilter="0.0,0.0; 0.25,0.07; 0.50,0.2; 0.75,0.467; 1.0,1.0">
+                                          <p:stCondLst>
+                                            <p:cond delay="0"/>
+                                          </p:stCondLst>
+                                        </p:cTn>
+                                        <p:tgtEl>
+                                          <p:spTgt spid="18"/>
+                                        </p:tgtEl>
+                                        <p:attrNameLst>
+                                          <p:attrName>ppt_y</p:attrName>
+                                        </p:attrNameLst>
+                                      </p:cBhvr>
+                                      <p:tavLst>
+                                        <p:tav tm="0" fmla="#ppt_y-sin(pi*$)/3">
+                                          <p:val>
+                                            <p:fltVal val="0.5"/>
+                                          </p:val>
+                                        </p:tav>
+                                        <p:tav tm="100000">
+                                          <p:val>
+                                            <p:fltVal val="1"/>
+                                          </p:val>
+                                        </p:tav>
+                                      </p:tavLst>
+                                    </p:anim>
+                                    <p:anim calcmode="lin" valueType="num">
+                                      <p:cBhvr>
+                                        <p:cTn id="10" dur="415" tmFilter="0, 0; 0.125,0.2665; 0.25,0.4; 0.375,0.465; 0.5,0.5;  0.625,0.535; 0.75,0.6; 0.875,0.7335; 1,1">
+                                          <p:stCondLst>
+                                            <p:cond delay="415"/>
+                                          </p:stCondLst>
+                                        </p:cTn>
+                                        <p:tgtEl>
+                                          <p:spTgt spid="18"/>
+                                        </p:tgtEl>
+                                        <p:attrNameLst>
+                                          <p:attrName>ppt_y</p:attrName>
+                                        </p:attrNameLst>
+                                      </p:cBhvr>
+                                      <p:tavLst>
+                                        <p:tav tm="0" fmla="#ppt_y-sin(pi*$)/9">
+                                          <p:val>
+                                            <p:fltVal val="0"/>
+                                          </p:val>
+                                        </p:tav>
+                                        <p:tav tm="100000">
+                                          <p:val>
+                                            <p:fltVal val="1"/>
+                                          </p:val>
+                                        </p:tav>
+                                      </p:tavLst>
+                                    </p:anim>
+                                    <p:anim calcmode="lin" valueType="num">
+                                      <p:cBhvr>
+                                        <p:cTn id="11" dur="208" tmFilter="0, 0; 0.125,0.2665; 0.25,0.4; 0.375,0.465; 0.5,0.5;  0.625,0.535; 0.75,0.6; 0.875,0.7335; 1,1">
+                                          <p:stCondLst>
+                                            <p:cond delay="828"/>
+                                          </p:stCondLst>
+                                        </p:cTn>
+                                        <p:tgtEl>
+                                          <p:spTgt spid="18"/>
+                                        </p:tgtEl>
+                                        <p:attrNameLst>
+                                          <p:attrName>ppt_y</p:attrName>
+                                        </p:attrNameLst>
+                                      </p:cBhvr>
+                                      <p:tavLst>
+                                        <p:tav tm="0" fmla="#ppt_y-sin(pi*$)/27">
+                                          <p:val>
+                                            <p:fltVal val="0"/>
+                                          </p:val>
+                                        </p:tav>
+                                        <p:tav tm="100000">
+                                          <p:val>
+                                            <p:fltVal val="1"/>
+                                          </p:val>
+                                        </p:tav>
+                                      </p:tavLst>
+                                    </p:anim>
+                                    <p:anim calcmode="lin" valueType="num">
+                                      <p:cBhvr>
+                                        <p:cTn id="12" dur="103" tmFilter="0, 0; 0.125,0.2665; 0.25,0.4; 0.375,0.465; 0.5,0.5;  0.625,0.535; 0.75,0.6; 0.875,0.7335; 1,1">
+                                          <p:stCondLst>
+                                            <p:cond delay="1035"/>
+                                          </p:stCondLst>
+                                        </p:cTn>
+                                        <p:tgtEl>
+                                          <p:spTgt spid="18"/>
+                                        </p:tgtEl>
+                                        <p:attrNameLst>
+                                          <p:attrName>ppt_y</p:attrName>
+                                        </p:attrNameLst>
+                                      </p:cBhvr>
+                                      <p:tavLst>
+                                        <p:tav tm="0" fmla="#ppt_y-sin(pi*$)/81">
+                                          <p:val>
+                                            <p:fltVal val="0"/>
+                                          </p:val>
+                                        </p:tav>
+                                        <p:tav tm="100000">
+                                          <p:val>
+                                            <p:fltVal val="1"/>
+                                          </p:val>
+                                        </p:tav>
+                                      </p:tavLst>
+                                    </p:anim>
+                                    <p:animScale>
+                                      <p:cBhvr>
+                                        <p:cTn id="13" dur="16">
+                                          <p:stCondLst>
+                                            <p:cond delay="406"/>
+                                          </p:stCondLst>
+                                        </p:cTn>
+                                        <p:tgtEl>
+                                          <p:spTgt spid="18"/>
+                                        </p:tgtEl>
+                                      </p:cBhvr>
+                                      <p:to x="100000" y="60000"/>
+                                    </p:animScale>
+                                    <p:animScale>
+                                      <p:cBhvr>
+                                        <p:cTn id="14" dur="104" decel="50000">
+                                          <p:stCondLst>
+                                            <p:cond delay="423"/>
+                                          </p:stCondLst>
+                                        </p:cTn>
+                                        <p:tgtEl>
+                                          <p:spTgt spid="18"/>
+                                        </p:tgtEl>
+                                      </p:cBhvr>
+                                      <p:to x="100000" y="100000"/>
+                                    </p:animScale>
+                                    <p:animScale>
+                                      <p:cBhvr>
+                                        <p:cTn id="15" dur="16">
+                                          <p:stCondLst>
+                                            <p:cond delay="820"/>
+                                          </p:stCondLst>
+                                        </p:cTn>
+                                        <p:tgtEl>
+                                          <p:spTgt spid="18"/>
+                                        </p:tgtEl>
+                                      </p:cBhvr>
+                                      <p:to x="100000" y="80000"/>
+                                    </p:animScale>
+                                    <p:animScale>
+                                      <p:cBhvr>
+                                        <p:cTn id="16" dur="104" decel="50000">
+                                          <p:stCondLst>
+                                            <p:cond delay="836"/>
+                                          </p:stCondLst>
+                                        </p:cTn>
+                                        <p:tgtEl>
+                                          <p:spTgt spid="18"/>
+                                        </p:tgtEl>
+                                      </p:cBhvr>
+                                      <p:to x="100000" y="100000"/>
+                                    </p:animScale>
+                                    <p:animScale>
+                                      <p:cBhvr>
+                                        <p:cTn id="17" dur="16">
+                                          <p:stCondLst>
+                                            <p:cond delay="1026"/>
+                                          </p:stCondLst>
+                                        </p:cTn>
+                                        <p:tgtEl>
+                                          <p:spTgt spid="18"/>
+                                        </p:tgtEl>
+                                      </p:cBhvr>
+                                      <p:to x="100000" y="90000"/>
+                                    </p:animScale>
+                                    <p:animScale>
+                                      <p:cBhvr>
+                                        <p:cTn id="18" dur="104" decel="50000">
+                                          <p:stCondLst>
+                                            <p:cond delay="1043"/>
+                                          </p:stCondLst>
+                                        </p:cTn>
+                                        <p:tgtEl>
+                                          <p:spTgt spid="18"/>
+                                        </p:tgtEl>
+                                      </p:cBhvr>
+                                      <p:to x="100000" y="100000"/>
+                                    </p:animScale>
+                                    <p:animScale>
+                                      <p:cBhvr>
+                                        <p:cTn id="19" dur="16">
+                                          <p:stCondLst>
+                                            <p:cond delay="1130"/>
+                                          </p:stCondLst>
+                                        </p:cTn>
+                                        <p:tgtEl>
+                                          <p:spTgt spid="18"/>
+                                        </p:tgtEl>
+                                      </p:cBhvr>
+                                      <p:to x="100000" y="95000"/>
+                                    </p:animScale>
+                                    <p:animScale>
+                                      <p:cBhvr>
+                                        <p:cTn id="20" dur="104" decel="50000">
+                                          <p:stCondLst>
+                                            <p:cond delay="1146"/>
+                                          </p:stCondLst>
+                                        </p:cTn>
+                                        <p:tgtEl>
+                                          <p:spTgt spid="18"/>
+                                        </p:tgtEl>
+                                      </p:cBhvr>
+                                      <p:to x="100000" y="100000"/>
+                                    </p:animScale>
+                                  </p:childTnLst>
+                                </p:cTn>
+                              </p:par>
+                            </p:childTnLst>
+                          </p:cTn>
+                        </p:par>
+                        <p:par>
+                          <p:cTn id="21" fill="hold">
+                            <p:stCondLst>
+                              <p:cond delay="1250"/>
+                            </p:stCondLst>
+                            <p:childTnLst>
+                              <p:par>
+                                <p:cTn id="22" presetID="26" presetClass="entr" presetSubtype="0" fill="hold" nodeType="afterEffect">
+                                  <p:stCondLst>
+                                    <p:cond delay="0"/>
+                                  </p:stCondLst>
+                                  <p:childTnLst>
+                                    <p:set>
+                                      <p:cBhvr>
+                                        <p:cTn id="23" dur="1" fill="hold">
+                                          <p:stCondLst>
+                                            <p:cond delay="0"/>
+                                          </p:stCondLst>
+                                        </p:cTn>
+                                        <p:tgtEl>
+                                          <p:spTgt spid="13"/>
+                                        </p:tgtEl>
+                                        <p:attrNameLst>
+                                          <p:attrName>style.visibility</p:attrName>
+                                        </p:attrNameLst>
+                                      </p:cBhvr>
+                                      <p:to>
+                                        <p:strVal val="visible"/>
+                                      </p:to>
+                                    </p:set>
+                                    <p:animEffect transition="in" filter="wipe(down)">
+                                      <p:cBhvr>
+                                        <p:cTn id="24" dur="363">
+                                          <p:stCondLst>
+                                            <p:cond delay="0"/>
+                                          </p:stCondLst>
+                                        </p:cTn>
+                                        <p:tgtEl>
+                                          <p:spTgt spid="13"/>
+                                        </p:tgtEl>
+                                      </p:cBhvr>
+                                    </p:animEffect>
+                                    <p:anim calcmode="lin" valueType="num">
+                                      <p:cBhvr>
+                                        <p:cTn id="25" dur="1139" tmFilter="0,0; 0.14,0.36; 0.43,0.73; 0.71,0.91; 1.0,1.0">
+                                          <p:stCondLst>
+                                            <p:cond delay="0"/>
+                                          </p:stCondLst>
+                                        </p:cTn>
+                                        <p:tgtEl>
+                                          <p:spTgt spid="13"/>
+                                        </p:tgtEl>
+                                        <p:attrNameLst>
+                                          <p:attrName>ppt_x</p:attrName>
+                                        </p:attrNameLst>
+                                      </p:cBhvr>
+                                      <p:tavLst>
+                                        <p:tav tm="0">
+                                          <p:val>
+                                            <p:strVal val="#ppt_x-0.25"/>
+                                          </p:val>
+                                        </p:tav>
+                                        <p:tav tm="100000">
+                                          <p:val>
+                                            <p:strVal val="#ppt_x"/>
+                                          </p:val>
+                                        </p:tav>
+                                      </p:tavLst>
+                                    </p:anim>
+                                    <p:anim calcmode="lin" valueType="num">
+                                      <p:cBhvr>
+                                        <p:cTn id="26" dur="415" tmFilter="0.0,0.0; 0.25,0.07; 0.50,0.2; 0.75,0.467; 1.0,1.0">
+                                          <p:stCondLst>
+                                            <p:cond delay="0"/>
+                                          </p:stCondLst>
+                                        </p:cTn>
+                                        <p:tgtEl>
+                                          <p:spTgt spid="13"/>
+                                        </p:tgtEl>
+                                        <p:attrNameLst>
+                                          <p:attrName>ppt_y</p:attrName>
+                                        </p:attrNameLst>
+                                      </p:cBhvr>
+                                      <p:tavLst>
+                                        <p:tav tm="0" fmla="#ppt_y-sin(pi*$)/3">
+                                          <p:val>
+                                            <p:fltVal val="0.5"/>
+                                          </p:val>
+                                        </p:tav>
+                                        <p:tav tm="100000">
+                                          <p:val>
+                                            <p:fltVal val="1"/>
+                                          </p:val>
+                                        </p:tav>
+                                      </p:tavLst>
+                                    </p:anim>
+                                    <p:anim calcmode="lin" valueType="num">
+                                      <p:cBhvr>
+                                        <p:cTn id="27" dur="415" tmFilter="0, 0; 0.125,0.2665; 0.25,0.4; 0.375,0.465; 0.5,0.5;  0.625,0.535; 0.75,0.6; 0.875,0.7335; 1,1">
+                                          <p:stCondLst>
+                                            <p:cond delay="415"/>
+                                          </p:stCondLst>
+                                        </p:cTn>
+                                        <p:tgtEl>
+                                          <p:spTgt spid="13"/>
+                                        </p:tgtEl>
+                                        <p:attrNameLst>
+                                          <p:attrName>ppt_y</p:attrName>
+                                        </p:attrNameLst>
+                                      </p:cBhvr>
+                                      <p:tavLst>
+                                        <p:tav tm="0" fmla="#ppt_y-sin(pi*$)/9">
+                                          <p:val>
+                                            <p:fltVal val="0"/>
+                                          </p:val>
+                                        </p:tav>
+                                        <p:tav tm="100000">
+                                          <p:val>
+                                            <p:fltVal val="1"/>
+                                          </p:val>
+                                        </p:tav>
+                                      </p:tavLst>
+                                    </p:anim>
+                                    <p:anim calcmode="lin" valueType="num">
+                                      <p:cBhvr>
+                                        <p:cTn id="28" dur="208" tmFilter="0, 0; 0.125,0.2665; 0.25,0.4; 0.375,0.465; 0.5,0.5;  0.625,0.535; 0.75,0.6; 0.875,0.7335; 1,1">
+                                          <p:stCondLst>
+                                            <p:cond delay="828"/>
+                                          </p:stCondLst>
+                                        </p:cTn>
+                                        <p:tgtEl>
+                                          <p:spTgt spid="13"/>
+                                        </p:tgtEl>
+                                        <p:attrNameLst>
+                                          <p:attrName>ppt_y</p:attrName>
+                                        </p:attrNameLst>
+                                      </p:cBhvr>
+                                      <p:tavLst>
+                                        <p:tav tm="0" fmla="#ppt_y-sin(pi*$)/27">
+                                          <p:val>
+                                            <p:fltVal val="0"/>
+                                          </p:val>
+                                        </p:tav>
+                                        <p:tav tm="100000">
+                                          <p:val>
+                                            <p:fltVal val="1"/>
+                                          </p:val>
+                                        </p:tav>
+                                      </p:tavLst>
+                                    </p:anim>
+                                    <p:anim calcmode="lin" valueType="num">
+                                      <p:cBhvr>
+                                        <p:cTn id="29" dur="103" tmFilter="0, 0; 0.125,0.2665; 0.25,0.4; 0.375,0.465; 0.5,0.5;  0.625,0.535; 0.75,0.6; 0.875,0.7335; 1,1">
+                                          <p:stCondLst>
+                                            <p:cond delay="1035"/>
+                                          </p:stCondLst>
+                                        </p:cTn>
+                                        <p:tgtEl>
+                                          <p:spTgt spid="13"/>
+                                        </p:tgtEl>
+                                        <p:attrNameLst>
+                                          <p:attrName>ppt_y</p:attrName>
+                                        </p:attrNameLst>
+                                      </p:cBhvr>
+                                      <p:tavLst>
+                                        <p:tav tm="0" fmla="#ppt_y-sin(pi*$)/81">
+                                          <p:val>
+                                            <p:fltVal val="0"/>
+                                          </p:val>
+                                        </p:tav>
+                                        <p:tav tm="100000">
+                                          <p:val>
+                                            <p:fltVal val="1"/>
+                                          </p:val>
+                                        </p:tav>
+                                      </p:tavLst>
+                                    </p:anim>
+                                    <p:animScale>
+                                      <p:cBhvr>
+                                        <p:cTn id="30" dur="16">
+                                          <p:stCondLst>
+                                            <p:cond delay="406"/>
+                                          </p:stCondLst>
+                                        </p:cTn>
+                                        <p:tgtEl>
+                                          <p:spTgt spid="13"/>
+                                        </p:tgtEl>
+                                      </p:cBhvr>
+                                      <p:to x="100000" y="60000"/>
+                                    </p:animScale>
+                                    <p:animScale>
+                                      <p:cBhvr>
+                                        <p:cTn id="31" dur="104" decel="50000">
+                                          <p:stCondLst>
+                                            <p:cond delay="423"/>
+                                          </p:stCondLst>
+                                        </p:cTn>
+                                        <p:tgtEl>
+                                          <p:spTgt spid="13"/>
+                                        </p:tgtEl>
+                                      </p:cBhvr>
+                                      <p:to x="100000" y="100000"/>
+                                    </p:animScale>
+                                    <p:animScale>
+                                      <p:cBhvr>
+                                        <p:cTn id="32" dur="16">
+                                          <p:stCondLst>
+                                            <p:cond delay="820"/>
+                                          </p:stCondLst>
+                                        </p:cTn>
+                                        <p:tgtEl>
+                                          <p:spTgt spid="13"/>
+                                        </p:tgtEl>
+                                      </p:cBhvr>
+                                      <p:to x="100000" y="80000"/>
+                                    </p:animScale>
+                                    <p:animScale>
+                                      <p:cBhvr>
+                                        <p:cTn id="33" dur="104" decel="50000">
+                                          <p:stCondLst>
+                                            <p:cond delay="836"/>
+                                          </p:stCondLst>
+                                        </p:cTn>
+                                        <p:tgtEl>
+                                          <p:spTgt spid="13"/>
+                                        </p:tgtEl>
+                                      </p:cBhvr>
+                                      <p:to x="100000" y="100000"/>
+                                    </p:animScale>
+                                    <p:animScale>
+                                      <p:cBhvr>
+                                        <p:cTn id="34" dur="16">
+                                          <p:stCondLst>
+                                            <p:cond delay="1026"/>
+                                          </p:stCondLst>
+                                        </p:cTn>
+                                        <p:tgtEl>
+                                          <p:spTgt spid="13"/>
+                                        </p:tgtEl>
+                                      </p:cBhvr>
+                                      <p:to x="100000" y="90000"/>
+                                    </p:animScale>
+                                    <p:animScale>
+                                      <p:cBhvr>
+                                        <p:cTn id="35" dur="104" decel="50000">
+                                          <p:stCondLst>
+                                            <p:cond delay="1043"/>
+                                          </p:stCondLst>
+                                        </p:cTn>
+                                        <p:tgtEl>
+                                          <p:spTgt spid="13"/>
+                                        </p:tgtEl>
+                                      </p:cBhvr>
+                                      <p:to x="100000" y="100000"/>
+                                    </p:animScale>
+                                    <p:animScale>
+                                      <p:cBhvr>
+                                        <p:cTn id="36" dur="16">
+                                          <p:stCondLst>
+                                            <p:cond delay="1130"/>
+                                          </p:stCondLst>
+                                        </p:cTn>
+                                        <p:tgtEl>
+                                          <p:spTgt spid="13"/>
+                                        </p:tgtEl>
+                                      </p:cBhvr>
+                                      <p:to x="100000" y="95000"/>
+                                    </p:animScale>
+                                    <p:animScale>
+                                      <p:cBhvr>
+                                        <p:cTn id="37" dur="104" decel="50000">
+                                          <p:stCondLst>
+                                            <p:cond delay="1146"/>
+                                          </p:stCondLst>
+                                        </p:cTn>
+                                        <p:tgtEl>
+                                          <p:spTgt spid="13"/>
+                                        </p:tgtEl>
+                                      </p:cBhvr>
+                                      <p:to x="100000" y="100000"/>
+                                    </p:animScale>
+                                  </p:childTnLst>
+                                </p:cTn>
+                              </p:par>
+                            </p:childTnLst>
+                          </p:cTn>
+                        </p:par>
+                        <p:par>
+                          <p:cTn id="38" fill="hold">
+                            <p:stCondLst>
+                              <p:cond delay="2500"/>
+                            </p:stCondLst>
+                            <p:childTnLst>
+                              <p:par>
+                                <p:cTn id="39" presetID="42" presetClass="entr" presetSubtype="0" fill="hold" nodeType="afterEffect">
+                                  <p:stCondLst>
+                                    <p:cond delay="0"/>
+                                  </p:stCondLst>
+                                  <p:childTnLst>
+                                    <p:set>
+                                      <p:cBhvr>
+                                        <p:cTn id="40" dur="1" fill="hold">
+                                          <p:stCondLst>
+                                            <p:cond delay="0"/>
+                                          </p:stCondLst>
+                                        </p:cTn>
+                                        <p:tgtEl>
+                                          <p:spTgt spid="24"/>
+                                        </p:tgtEl>
+                                        <p:attrNameLst>
+                                          <p:attrName>style.visibility</p:attrName>
+                                        </p:attrNameLst>
+                                      </p:cBhvr>
+                                      <p:to>
+                                        <p:strVal val="visible"/>
+                                      </p:to>
+                                    </p:set>
+                                    <p:animEffect transition="in" filter="fade">
+                                      <p:cBhvr>
+                                        <p:cTn id="41" dur="1250"/>
+                                        <p:tgtEl>
+                                          <p:spTgt spid="24"/>
+                                        </p:tgtEl>
+                                      </p:cBhvr>
+                                    </p:animEffect>
+                                    <p:anim calcmode="lin" valueType="num">
+                                      <p:cBhvr>
+                                        <p:cTn id="42" dur="1250" fill="hold"/>
+                                        <p:tgtEl>
+                                          <p:spTgt spid="24"/>
+                                        </p:tgtEl>
+                                        <p:attrNameLst>
+                                          <p:attrName>ppt_x</p:attrName>
+                                        </p:attrNameLst>
+                                      </p:cBhvr>
+                                      <p:tavLst>
+                                        <p:tav tm="0">
+                                          <p:val>
+                                            <p:strVal val="#ppt_x"/>
+                                          </p:val>
+                                        </p:tav>
+                                        <p:tav tm="100000">
+                                          <p:val>
+                                            <p:strVal val="#ppt_x"/>
+                                          </p:val>
+                                        </p:tav>
+                                      </p:tavLst>
+                                    </p:anim>
+                                    <p:anim calcmode="lin" valueType="num">
+                                      <p:cBhvr>
+                                        <p:cTn id="43" dur="1250" fill="hold"/>
+                                        <p:tgtEl>
+                                          <p:spTgt spid="24"/>
+                                        </p:tgtEl>
+                                        <p:attrNameLst>
+                                          <p:attrName>ppt_y</p:attrName>
+                                        </p:attrNameLst>
+                                      </p:cBhvr>
+                                      <p:tavLst>
+                                        <p:tav tm="0">
+                                          <p:val>
+                                            <p:strVal val="#ppt_y+.1"/>
+                                          </p:val>
+                                        </p:tav>
+                                        <p:tav tm="100000">
+                                          <p:val>
+                                            <p:strVal val="#ppt_y"/>
+                                          </p:val>
+                                        </p:tav>
+                                      </p:tavLst>
+                                    </p:anim>
+                                  </p:childTnLst>
+                                </p:cTn>
+                              </p:par>
+                            </p:childTnLst>
+                          </p:cTn>
+                        </p:par>
+                        <p:par>
+                          <p:cTn id="44" fill="hold">
+                            <p:stCondLst>
+                              <p:cond delay="3750"/>
+                            </p:stCondLst>
+                            <p:childTnLst>
+                              <p:par>
+                                <p:cTn id="45" presetID="26" presetClass="exit" presetSubtype="0" fill="hold" nodeType="afterEffect">
+                                  <p:stCondLst>
+                                    <p:cond delay="4000"/>
+                                  </p:stCondLst>
+                                  <p:childTnLst>
+                                    <p:animEffect transition="out" filter="wipe(down)">
+                                      <p:cBhvr>
+                                        <p:cTn id="46" dur="113" accel="50000">
+                                          <p:stCondLst>
+                                            <p:cond delay="1137"/>
+                                          </p:stCondLst>
+                                        </p:cTn>
+                                        <p:tgtEl>
+                                          <p:spTgt spid="18"/>
+                                        </p:tgtEl>
+                                      </p:cBhvr>
+                                    </p:animEffect>
+                                    <p:anim calcmode="lin" valueType="num">
+                                      <p:cBhvr>
+                                        <p:cTn id="47" dur="1139" tmFilter="0,0; 0.14,0.31; 0.43,0.73; 0.71,0.91; 1.0,1.0">
+                                          <p:stCondLst>
+                                            <p:cond delay="0"/>
+                                          </p:stCondLst>
+                                        </p:cTn>
+                                        <p:tgtEl>
+                                          <p:spTgt spid="18"/>
+                                        </p:tgtEl>
+                                        <p:attrNameLst>
+                                          <p:attrName>ppt_x</p:attrName>
+                                        </p:attrNameLst>
+                                      </p:cBhvr>
+                                      <p:tavLst>
+                                        <p:tav tm="0">
+                                          <p:val>
+                                            <p:strVal val="ppt_x"/>
+                                          </p:val>
+                                        </p:tav>
+                                        <p:tav tm="100000">
+                                          <p:val>
+                                            <p:strVal val="#ppt_x+0.25"/>
+                                          </p:val>
+                                        </p:tav>
+                                      </p:tavLst>
+                                    </p:anim>
+                                    <p:anim calcmode="lin" valueType="num">
+                                      <p:cBhvr>
+                                        <p:cTn id="48" dur="111">
+                                          <p:stCondLst>
+                                            <p:cond delay="1139"/>
+                                          </p:stCondLst>
+                                        </p:cTn>
+                                        <p:tgtEl>
+                                          <p:spTgt spid="18"/>
+                                        </p:tgtEl>
+                                        <p:attrNameLst>
+                                          <p:attrName>ppt_x</p:attrName>
+                                        </p:attrNameLst>
+                                      </p:cBhvr>
+                                      <p:tavLst>
+                                        <p:tav tm="0">
+                                          <p:val>
+                                            <p:strVal val="ppt_x"/>
+                                          </p:val>
+                                        </p:tav>
+                                        <p:tav tm="100000">
+                                          <p:val>
+                                            <p:strVal val="ppt_x"/>
+                                          </p:val>
+                                        </p:tav>
+                                      </p:tavLst>
+                                    </p:anim>
+                                    <p:anim calcmode="lin" valueType="num">
+                                      <p:cBhvr>
+                                        <p:cTn id="49" dur="415" tmFilter="0.0,0.0;0.25,0.07;0.50,0.2;0.75,0.467;1.0,1.0">
+                                          <p:stCondLst>
+                                            <p:cond delay="0"/>
+                                          </p:stCondLst>
+                                        </p:cTn>
+                                        <p:tgtEl>
+                                          <p:spTgt spid="18"/>
+                                        </p:tgtEl>
+                                        <p:attrNameLst>
+                                          <p:attrName>ppt_y</p:attrName>
+                                        </p:attrNameLst>
+                                      </p:cBhvr>
+                                      <p:tavLst>
+                                        <p:tav tm="0">
+                                          <p:val>
+                                            <p:strVal val="ppt_y"/>
+                                          </p:val>
+                                        </p:tav>
+                                        <p:tav tm="5000">
+                                          <p:val>
+                                            <p:strVal val="ppt_y+0.026"/>
+                                          </p:val>
+                                        </p:tav>
+                                        <p:tav tm="10000">
+                                          <p:val>
+                                            <p:strVal val="ppt_y+0.052"/>
+                                          </p:val>
+                                        </p:tav>
+                                        <p:tav tm="15000">
+                                          <p:val>
+                                            <p:strVal val="ppt_y+0.078"/>
+                                          </p:val>
+                                        </p:tav>
+                                        <p:tav tm="20000">
+                                          <p:val>
+                                            <p:strVal val="ppt_y+0.103"/>
+                                          </p:val>
+                                        </p:tav>
+                                        <p:tav tm="30000">
+                                          <p:val>
+                                            <p:strVal val="ppt_y+0.151"/>
+                                          </p:val>
+                                        </p:tav>
+                                        <p:tav tm="40000">
+                                          <p:val>
+                                            <p:strVal val="ppt_y+0.196"/>
+                                          </p:val>
+                                        </p:tav>
+                                        <p:tav tm="50000">
+                                          <p:val>
+                                            <p:strVal val="ppt_y+0.236"/>
+                                          </p:val>
+                                        </p:tav>
+                                        <p:tav tm="60000">
+                                          <p:val>
+                                            <p:strVal val="ppt_y+0.270"/>
+                                          </p:val>
+                                        </p:tav>
+                                        <p:tav tm="70000">
+                                          <p:val>
+                                            <p:strVal val="ppt_y+0.297"/>
+                                          </p:val>
+                                        </p:tav>
+                                        <p:tav tm="80000">
+                                          <p:val>
+                                            <p:strVal val="ppt_y+0.317"/>
+                                          </p:val>
+                                        </p:tav>
+                                        <p:tav tm="90000">
+                                          <p:val>
+                                            <p:strVal val="ppt_y+0.329"/>
+                                          </p:val>
+                                        </p:tav>
+                                        <p:tav tm="100000">
+                                          <p:val>
+                                            <p:strVal val="ppt_y+0.333"/>
+                                          </p:val>
+                                        </p:tav>
+                                      </p:tavLst>
+                                    </p:anim>
+                                    <p:anim calcmode="lin" valueType="num">
+                                      <p:cBhvr>
+                                        <p:cTn id="50" dur="415" tmFilter="0, 0; 0.125,0.2665; 0.25,0.4; 0.375,0.465; 0.5,0.5;  0.625,0.535; 0.75,0.6; 0.875,0.7335; 1,1">
+                                          <p:stCondLst>
+                                            <p:cond delay="415"/>
+                                          </p:stCondLst>
+                                        </p:cTn>
+                                        <p:tgtEl>
+                                          <p:spTgt spid="18"/>
+                                        </p:tgtEl>
+                                        <p:attrNameLst>
+                                          <p:attrName>ppt_y</p:attrName>
+                                        </p:attrNameLst>
+                                      </p:cBhvr>
+                                      <p:tavLst>
+                                        <p:tav tm="0">
+                                          <p:val>
+                                            <p:strVal val="ppt_y"/>
+                                          </p:val>
+                                        </p:tav>
+                                        <p:tav tm="10000">
+                                          <p:val>
+                                            <p:strVal val="ppt_y-0.034"/>
+                                          </p:val>
+                                        </p:tav>
+                                        <p:tav tm="20000">
+                                          <p:val>
+                                            <p:strVal val="ppt_y-0.065"/>
+                                          </p:val>
+                                        </p:tav>
+                                        <p:tav tm="30000">
+                                          <p:val>
+                                            <p:strVal val="ppt_y-0.090"/>
+                                          </p:val>
+                                        </p:tav>
+                                        <p:tav tm="40000">
+                                          <p:val>
+                                            <p:strVal val="ppt_y-0.106"/>
+                                          </p:val>
+                                        </p:tav>
+                                        <p:tav tm="50000">
+                                          <p:val>
+                                            <p:strVal val="ppt_y-0.111"/>
+                                          </p:val>
+                                        </p:tav>
+                                        <p:tav tm="60000">
+                                          <p:val>
+                                            <p:strVal val="ppt_y-0.106"/>
+                                          </p:val>
+                                        </p:tav>
+                                        <p:tav tm="70000">
+                                          <p:val>
+                                            <p:strVal val="ppt_y-0.090"/>
+                                          </p:val>
+                                        </p:tav>
+                                        <p:tav tm="80000">
+                                          <p:val>
+                                            <p:strVal val="ppt_y-0.065"/>
+                                          </p:val>
+                                        </p:tav>
+                                        <p:tav tm="90000">
+                                          <p:val>
+                                            <p:strVal val="ppt_y-0.034"/>
+                                          </p:val>
+                                        </p:tav>
+                                        <p:tav tm="100000">
+                                          <p:val>
+                                            <p:strVal val="ppt_y"/>
+                                          </p:val>
+                                        </p:tav>
+                                      </p:tavLst>
+                                    </p:anim>
+                                    <p:anim calcmode="lin" valueType="num">
+                                      <p:cBhvr>
+                                        <p:cTn id="51" dur="207" tmFilter="0, 0; 0.125,0.2665; 0.25,0.4; 0.375,0.465; 0.5,0.5;  0.625,0.535; 0.75,0.6; 0.875,0.7335; 1,1">
+                                          <p:stCondLst>
+                                            <p:cond delay="827"/>
+                                          </p:stCondLst>
+                                        </p:cTn>
+                                        <p:tgtEl>
+                                          <p:spTgt spid="18"/>
+                                        </p:tgtEl>
+                                        <p:attrNameLst>
+                                          <p:attrName>ppt_y</p:attrName>
+                                        </p:attrNameLst>
+                                      </p:cBhvr>
+                                      <p:tavLst>
+                                        <p:tav tm="0">
+                                          <p:val>
+                                            <p:strVal val="ppt_y"/>
+                                          </p:val>
+                                        </p:tav>
+                                        <p:tav tm="10000">
+                                          <p:val>
+                                            <p:strVal val="ppt_y-0.011"/>
+                                          </p:val>
+                                        </p:tav>
+                                        <p:tav tm="20000">
+                                          <p:val>
+                                            <p:strVal val="ppt_y-0.022"/>
+                                          </p:val>
+                                        </p:tav>
+                                        <p:tav tm="30000">
+                                          <p:val>
+                                            <p:strVal val="ppt_y-0.030"/>
+                                          </p:val>
+                                        </p:tav>
+                                        <p:tav tm="40000">
+                                          <p:val>
+                                            <p:strVal val="ppt_y-0.035"/>
+                                          </p:val>
+                                        </p:tav>
+                                        <p:tav tm="50000">
+                                          <p:val>
+                                            <p:strVal val="ppt_y-0.037"/>
+                                          </p:val>
+                                        </p:tav>
+                                        <p:tav tm="60000">
+                                          <p:val>
+                                            <p:strVal val="ppt_y-0.035"/>
+                                          </p:val>
+                                        </p:tav>
+                                        <p:tav tm="70000">
+                                          <p:val>
+                                            <p:strVal val="ppt_y-0.030"/>
+                                          </p:val>
+                                        </p:tav>
+                                        <p:tav tm="80000">
+                                          <p:val>
+                                            <p:strVal val="ppt_y-0.022"/>
+                                          </p:val>
+                                        </p:tav>
+                                        <p:tav tm="90000">
+                                          <p:val>
+                                            <p:strVal val="ppt_y-0.011"/>
+                                          </p:val>
+                                        </p:tav>
+                                        <p:tav tm="100000">
+                                          <p:val>
+                                            <p:strVal val="ppt_y"/>
+                                          </p:val>
+                                        </p:tav>
+                                      </p:tavLst>
+                                    </p:anim>
+                                    <p:anim calcmode="lin" valueType="num">
+                                      <p:cBhvr>
+                                        <p:cTn id="52" dur="102" tmFilter="0, 0; 0.125,0.2665; 0.25,0.4; 0.375,0.465; 0.5,0.5;  0.625,0.535; 0.75,0.6; 0.875,0.7335; 1,1">
+                                          <p:stCondLst>
+                                            <p:cond delay="1035"/>
+                                          </p:stCondLst>
+                                        </p:cTn>
+                                        <p:tgtEl>
+                                          <p:spTgt spid="18"/>
+                                        </p:tgtEl>
+                                        <p:attrNameLst>
+                                          <p:attrName>ppt_y</p:attrName>
+                                        </p:attrNameLst>
+                                      </p:cBhvr>
+                                      <p:tavLst>
+                                        <p:tav tm="0">
+                                          <p:val>
+                                            <p:strVal val="ppt_y"/>
+                                          </p:val>
+                                        </p:tav>
+                                        <p:tav tm="10000">
+                                          <p:val>
+                                            <p:strVal val="ppt_y-0.004"/>
+                                          </p:val>
+                                        </p:tav>
+                                        <p:tav tm="20000">
+                                          <p:val>
+                                            <p:strVal val="ppt_y-0.007"/>
+                                          </p:val>
+                                        </p:tav>
+                                        <p:tav tm="30000">
+                                          <p:val>
+                                            <p:strVal val="ppt_y-0.010"/>
+                                          </p:val>
+                                        </p:tav>
+                                        <p:tav tm="40000">
+                                          <p:val>
+                                            <p:strVal val="ppt_y-0.012"/>
+                                          </p:val>
+                                        </p:tav>
+                                        <p:tav tm="50000">
+                                          <p:val>
+                                            <p:strVal val="ppt_y-0.0123"/>
+                                          </p:val>
+                                        </p:tav>
+                                        <p:tav tm="60000">
+                                          <p:val>
+                                            <p:strVal val="ppt_y-0.012"/>
+                                          </p:val>
+                                        </p:tav>
+                                        <p:tav tm="70000">
+                                          <p:val>
+                                            <p:strVal val="ppt_y-0.010"/>
+                                          </p:val>
+                                        </p:tav>
+                                        <p:tav tm="80000">
+                                          <p:val>
+                                            <p:strVal val="ppt_y-0.007"/>
+                                          </p:val>
+                                        </p:tav>
+                                        <p:tav tm="90000">
+                                          <p:val>
+                                            <p:strVal val="ppt_y-0.004"/>
+                                          </p:val>
+                                        </p:tav>
+                                        <p:tav tm="100000">
+                                          <p:val>
+                                            <p:strVal val="ppt_y"/>
+                                          </p:val>
+                                        </p:tav>
+                                      </p:tavLst>
+                                    </p:anim>
+                                    <p:anim calcmode="lin" valueType="num">
+                                      <p:cBhvr>
+                                        <p:cTn id="53" dur="113" accel="50000">
+                                          <p:stCondLst>
+                                            <p:cond delay="1137"/>
+                                          </p:stCondLst>
+                                        </p:cTn>
+                                        <p:tgtEl>
+                                          <p:spTgt spid="18"/>
+                                        </p:tgtEl>
+                                        <p:attrNameLst>
+                                          <p:attrName>ppt_y</p:attrName>
+                                        </p:attrNameLst>
+                                      </p:cBhvr>
+                                      <p:tavLst>
+                                        <p:tav tm="0">
+                                          <p:val>
+                                            <p:strVal val="ppt_y"/>
+                                          </p:val>
+                                        </p:tav>
+                                        <p:tav tm="100000">
+                                          <p:val>
+                                            <p:strVal val="ppt_y+ppt_h"/>
+                                          </p:val>
+                                        </p:tav>
+                                      </p:tavLst>
+                                    </p:anim>
+                                    <p:animScale>
+                                      <p:cBhvr>
+                                        <p:cTn id="54" dur="16">
+                                          <p:stCondLst>
+                                            <p:cond delay="387"/>
+                                          </p:stCondLst>
+                                        </p:cTn>
+                                        <p:tgtEl>
+                                          <p:spTgt spid="18"/>
+                                        </p:tgtEl>
+                                      </p:cBhvr>
+                                      <p:to x="100000" y="60000"/>
+                                    </p:animScale>
+                                    <p:animScale>
+                                      <p:cBhvr>
+                                        <p:cTn id="55" dur="104" decel="50000">
+                                          <p:stCondLst>
+                                            <p:cond delay="404"/>
+                                          </p:stCondLst>
+                                        </p:cTn>
+                                        <p:tgtEl>
+                                          <p:spTgt spid="18"/>
+                                        </p:tgtEl>
+                                      </p:cBhvr>
+                                      <p:to x="100000" y="100000"/>
+                                    </p:animScale>
+                                    <p:animScale>
+                                      <p:cBhvr>
+                                        <p:cTn id="56" dur="16">
+                                          <p:stCondLst>
+                                            <p:cond delay="820"/>
+                                          </p:stCondLst>
+                                        </p:cTn>
+                                        <p:tgtEl>
+                                          <p:spTgt spid="18"/>
+                                        </p:tgtEl>
+                                      </p:cBhvr>
+                                      <p:to x="100000" y="80000"/>
+                                    </p:animScale>
+                                    <p:animScale>
+                                      <p:cBhvr>
+                                        <p:cTn id="57" dur="104" decel="50000">
+                                          <p:stCondLst>
+                                            <p:cond delay="836"/>
+                                          </p:stCondLst>
+                                        </p:cTn>
+                                        <p:tgtEl>
+                                          <p:spTgt spid="18"/>
+                                        </p:tgtEl>
+                                      </p:cBhvr>
+                                      <p:to x="100000" y="100000"/>
+                                    </p:animScale>
+                                    <p:animScale>
+                                      <p:cBhvr>
+                                        <p:cTn id="58" dur="16">
+                                          <p:stCondLst>
+                                            <p:cond delay="1026"/>
+                                          </p:stCondLst>
+                                        </p:cTn>
+                                        <p:tgtEl>
+                                          <p:spTgt spid="18"/>
+                                        </p:tgtEl>
+                                      </p:cBhvr>
+                                      <p:to x="100000" y="90000"/>
+                                    </p:animScale>
+                                    <p:animScale>
+                                      <p:cBhvr>
+                                        <p:cTn id="59" dur="104" decel="50000">
+                                          <p:stCondLst>
+                                            <p:cond delay="1042"/>
+                                          </p:stCondLst>
+                                        </p:cTn>
+                                        <p:tgtEl>
+                                          <p:spTgt spid="18"/>
+                                        </p:tgtEl>
+                                      </p:cBhvr>
+                                      <p:to x="100000" y="100000"/>
+                                    </p:animScale>
+                                    <p:animScale>
+                                      <p:cBhvr>
+                                        <p:cTn id="60" dur="16">
+                                          <p:stCondLst>
+                                            <p:cond delay="1130"/>
+                                          </p:stCondLst>
+                                        </p:cTn>
+                                        <p:tgtEl>
+                                          <p:spTgt spid="18"/>
+                                        </p:tgtEl>
+                                      </p:cBhvr>
+                                      <p:to x="100000" y="95000"/>
+                                    </p:animScale>
+                                    <p:animScale>
+                                      <p:cBhvr>
+                                        <p:cTn id="61" dur="104" decel="50000">
+                                          <p:stCondLst>
+                                            <p:cond delay="1146"/>
+                                          </p:stCondLst>
+                                        </p:cTn>
+                                        <p:tgtEl>
+                                          <p:spTgt spid="18"/>
+                                        </p:tgtEl>
+                                      </p:cBhvr>
+                                      <p:to x="100000" y="100000"/>
+                                    </p:animScale>
+                                    <p:set>
+                                      <p:cBhvr>
+                                        <p:cTn id="62" dur="1" fill="hold">
+                                          <p:stCondLst>
+                                            <p:cond delay="1249"/>
+                                          </p:stCondLst>
+                                        </p:cTn>
+                                        <p:tgtEl>
+                                          <p:spTgt spid="18"/>
+                                        </p:tgtEl>
+                                        <p:attrNameLst>
+                                          <p:attrName>style.visibility</p:attrName>
+                                        </p:attrNameLst>
+                                      </p:cBhvr>
+                                      <p:to>
+                                        <p:strVal val="hidden"/>
+                                      </p:to>
+                                    </p:set>
+                                  </p:childTnLst>
+                                </p:cTn>
+                              </p:par>
+                            </p:childTnLst>
+                          </p:cTn>
+                        </p:par>
+                        <p:par>
+                          <p:cTn id="63" fill="hold">
+                            <p:stCondLst>
+                              <p:cond delay="9000"/>
+                            </p:stCondLst>
+                            <p:childTnLst>
+                              <p:par>
+                                <p:cTn id="64" presetID="45" presetClass="exit" presetSubtype="0" fill="hold" nodeType="afterEffect">
+                                  <p:stCondLst>
+                                    <p:cond delay="0"/>
+                                  </p:stCondLst>
+                                  <p:childTnLst>
+                                    <p:animEffect transition="out" filter="fade">
+                                      <p:cBhvr>
+                                        <p:cTn id="65" dur="1250"/>
+                                        <p:tgtEl>
+                                          <p:spTgt spid="13"/>
+                                        </p:tgtEl>
+                                      </p:cBhvr>
+                                    </p:animEffect>
+                                    <p:anim calcmode="lin" valueType="num">
+                                      <p:cBhvr>
+                                        <p:cTn id="66" dur="1250"/>
+                                        <p:tgtEl>
+                                          <p:spTgt spid="13"/>
+                                        </p:tgtEl>
+                                        <p:attrNameLst>
+                                          <p:attrName>ppt_w</p:attrName>
+                                        </p:attrNameLst>
+                                      </p:cBhvr>
+                                      <p:tavLst>
+                                        <p:tav tm="0">
+                                          <p:val>
+                                            <p:strVal val="ppt_w"/>
+                                          </p:val>
+                                        </p:tav>
+                                        <p:tav tm="5000">
+                                          <p:val>
+                                            <p:strVal val="0.92*ppt_w"/>
+                                          </p:val>
+                                        </p:tav>
+                                        <p:tav tm="10000">
+                                          <p:val>
+                                            <p:strVal val="0.71*ppt_w"/>
+                                          </p:val>
+                                        </p:tav>
+                                        <p:tav tm="15000">
+                                          <p:val>
+                                            <p:strVal val="0.38*ppt_w"/>
+                                          </p:val>
+                                        </p:tav>
+                                        <p:tav tm="20000">
+                                          <p:val>
+                                            <p:fltVal val="0"/>
+                                          </p:val>
+                                        </p:tav>
+                                        <p:tav tm="25000">
+                                          <p:val>
+                                            <p:strVal val="-0.38*ppt_w"/>
+                                          </p:val>
+                                        </p:tav>
+                                        <p:tav tm="30000">
+                                          <p:val>
+                                            <p:strVal val="-0.71*ppt_w"/>
+                                          </p:val>
+                                        </p:tav>
+                                        <p:tav tm="35000">
+                                          <p:val>
+                                            <p:strVal val="-0.92*ppt_w"/>
+                                          </p:val>
+                                        </p:tav>
+                                        <p:tav tm="40000">
+                                          <p:val>
+                                            <p:strVal val="-ppt_w"/>
+                                          </p:val>
+                                        </p:tav>
+                                        <p:tav tm="45000">
+                                          <p:val>
+                                            <p:strVal val="-0.92*ppt_w"/>
+                                          </p:val>
+                                        </p:tav>
+                                        <p:tav tm="50000">
+                                          <p:val>
+                                            <p:strVal val="-0.71*ppt_w"/>
+                                          </p:val>
+                                        </p:tav>
+                                        <p:tav tm="55000">
+                                          <p:val>
+                                            <p:strVal val="-0.38*ppt_w"/>
+                                          </p:val>
+                                        </p:tav>
+                                        <p:tav tm="60000">
+                                          <p:val>
+                                            <p:fltVal val="0"/>
+                                          </p:val>
+                                        </p:tav>
+                                        <p:tav tm="65000">
+                                          <p:val>
+                                            <p:strVal val="0.38*ppt_w"/>
+                                          </p:val>
+                                        </p:tav>
+                                        <p:tav tm="70000">
+                                          <p:val>
+                                            <p:strVal val="0.71*ppt_w"/>
+                                          </p:val>
+                                        </p:tav>
+                                        <p:tav tm="75000">
+                                          <p:val>
+                                            <p:strVal val="0.92*ppt_w"/>
+                                          </p:val>
+                                        </p:tav>
+                                        <p:tav tm="80000">
+                                          <p:val>
+                                            <p:strVal val="ppt_w"/>
+                                          </p:val>
+                                        </p:tav>
+                                        <p:tav tm="85000">
+                                          <p:val>
+                                            <p:strVal val="0.92*ppt_w"/>
+                                          </p:val>
+                                        </p:tav>
+                                        <p:tav tm="90000">
+                                          <p:val>
+                                            <p:strVal val="0.71*ppt_w"/>
+                                          </p:val>
+                                        </p:tav>
+                                        <p:tav tm="95000">
+                                          <p:val>
+                                            <p:strVal val="0.38*ppt_w"/>
+                                          </p:val>
+                                        </p:tav>
+                                        <p:tav tm="100000">
+                                          <p:val>
+                                            <p:fltVal val="0"/>
+                                          </p:val>
+                                        </p:tav>
+                                      </p:tavLst>
+                                    </p:anim>
+                                    <p:anim calcmode="lin" valueType="num">
+                                      <p:cBhvr>
+                                        <p:cTn id="67" dur="1250"/>
+                                        <p:tgtEl>
+                                          <p:spTgt spid="13"/>
+                                        </p:tgtEl>
+                                        <p:attrNameLst>
+                                          <p:attrName>ppt_h</p:attrName>
+                                        </p:attrNameLst>
+                                      </p:cBhvr>
+                                      <p:tavLst>
+                                        <p:tav tm="0">
+                                          <p:val>
+                                            <p:strVal val="ppt_h"/>
+                                          </p:val>
+                                        </p:tav>
+                                        <p:tav tm="100000">
+                                          <p:val>
+                                            <p:strVal val="ppt_h"/>
+                                          </p:val>
+                                        </p:tav>
+                                      </p:tavLst>
+                                    </p:anim>
+                                    <p:set>
+                                      <p:cBhvr>
+                                        <p:cTn id="68" dur="1" fill="hold">
+                                          <p:stCondLst>
+                                            <p:cond delay="1249"/>
+                                          </p:stCondLst>
+                                        </p:cTn>
+                                        <p:tgtEl>
+                                          <p:spTgt spid="13"/>
+                                        </p:tgtEl>
+                                        <p:attrNameLst>
+                                          <p:attrName>style.visibility</p:attrName>
+                                        </p:attrNameLst>
+                                      </p:cBhvr>
+                                      <p:to>
+                                        <p:strVal val="hidden"/>
+                                      </p:to>
+                                    </p:set>
+                                  </p:childTnLst>
+                                </p:cTn>
+                              </p:par>
+                              <p:par>
+                                <p:cTn id="69" presetID="45" presetClass="exit" presetSubtype="0" fill="hold" nodeType="withEffect">
+                                  <p:stCondLst>
+                                    <p:cond delay="0"/>
+                                  </p:stCondLst>
+                                  <p:childTnLst>
+                                    <p:animEffect transition="out" filter="fade">
+                                      <p:cBhvr>
+                                        <p:cTn id="70" dur="1250"/>
+                                        <p:tgtEl>
+                                          <p:spTgt spid="24"/>
+                                        </p:tgtEl>
+                                      </p:cBhvr>
+                                    </p:animEffect>
+                                    <p:anim calcmode="lin" valueType="num">
+                                      <p:cBhvr>
+                                        <p:cTn id="71" dur="1250"/>
+                                        <p:tgtEl>
+                                          <p:spTgt spid="24"/>
+                                        </p:tgtEl>
+                                        <p:attrNameLst>
+                                          <p:attrName>ppt_w</p:attrName>
+                                        </p:attrNameLst>
+                                      </p:cBhvr>
+                                      <p:tavLst>
+                                        <p:tav tm="0">
+                                          <p:val>
+                                            <p:strVal val="ppt_w"/>
+                                          </p:val>
+                                        </p:tav>
+                                        <p:tav tm="5000">
+                                          <p:val>
+                                            <p:strVal val="0.92*ppt_w"/>
+                                          </p:val>
+                                        </p:tav>
+                                        <p:tav tm="10000">
+                                          <p:val>
+                                            <p:strVal val="0.71*ppt_w"/>
+                                          </p:val>
+                                        </p:tav>
+                                        <p:tav tm="15000">
+                                          <p:val>
+                                            <p:strVal val="0.38*ppt_w"/>
+                                          </p:val>
+                                        </p:tav>
+                                        <p:tav tm="20000">
+                                          <p:val>
+                                            <p:fltVal val="0"/>
+                                          </p:val>
+                                        </p:tav>
+                                        <p:tav tm="25000">
+                                          <p:val>
+                                            <p:strVal val="-0.38*ppt_w"/>
+                                          </p:val>
+                                        </p:tav>
+                                        <p:tav tm="30000">
+                                          <p:val>
+                                            <p:strVal val="-0.71*ppt_w"/>
+                                          </p:val>
+                                        </p:tav>
+                                        <p:tav tm="35000">
+                                          <p:val>
+                                            <p:strVal val="-0.92*ppt_w"/>
+                                          </p:val>
+                                        </p:tav>
+                                        <p:tav tm="40000">
+                                          <p:val>
+                                            <p:strVal val="-ppt_w"/>
+                                          </p:val>
+                                        </p:tav>
+                                        <p:tav tm="45000">
+                                          <p:val>
+                                            <p:strVal val="-0.92*ppt_w"/>
+                                          </p:val>
+                                        </p:tav>
+                                        <p:tav tm="50000">
+                                          <p:val>
+                                            <p:strVal val="-0.71*ppt_w"/>
+                                          </p:val>
+                                        </p:tav>
+                                        <p:tav tm="55000">
+                                          <p:val>
+                                            <p:strVal val="-0.38*ppt_w"/>
+                                          </p:val>
+                                        </p:tav>
+                                        <p:tav tm="60000">
+                                          <p:val>
+                                            <p:fltVal val="0"/>
+                                          </p:val>
+                                        </p:tav>
+                                        <p:tav tm="65000">
+                                          <p:val>
+                                            <p:strVal val="0.38*ppt_w"/>
+                                          </p:val>
+                                        </p:tav>
+                                        <p:tav tm="70000">
+                                          <p:val>
+                                            <p:strVal val="0.71*ppt_w"/>
+                                          </p:val>
+                                        </p:tav>
+                                        <p:tav tm="75000">
+                                          <p:val>
+                                            <p:strVal val="0.92*ppt_w"/>
+                                          </p:val>
+                                        </p:tav>
+                                        <p:tav tm="80000">
+                                          <p:val>
+                                            <p:strVal val="ppt_w"/>
+                                          </p:val>
+                                        </p:tav>
+                                        <p:tav tm="85000">
+                                          <p:val>
+                                            <p:strVal val="0.92*ppt_w"/>
+                                          </p:val>
+                                        </p:tav>
+                                        <p:tav tm="90000">
+                                          <p:val>
+                                            <p:strVal val="0.71*ppt_w"/>
+                                          </p:val>
+                                        </p:tav>
+                                        <p:tav tm="95000">
+                                          <p:val>
+                                            <p:strVal val="0.38*ppt_w"/>
+                                          </p:val>
+                                        </p:tav>
+                                        <p:tav tm="100000">
+                                          <p:val>
+                                            <p:fltVal val="0"/>
+                                          </p:val>
+                                        </p:tav>
+                                      </p:tavLst>
+                                    </p:anim>
+                                    <p:anim calcmode="lin" valueType="num">
+                                      <p:cBhvr>
+                                        <p:cTn id="72" dur="1250"/>
+                                        <p:tgtEl>
+                                          <p:spTgt spid="24"/>
+                                        </p:tgtEl>
+                                        <p:attrNameLst>
+                                          <p:attrName>ppt_h</p:attrName>
+                                        </p:attrNameLst>
+                                      </p:cBhvr>
+                                      <p:tavLst>
+                                        <p:tav tm="0">
+                                          <p:val>
+                                            <p:strVal val="ppt_h"/>
+                                          </p:val>
+                                        </p:tav>
+                                        <p:tav tm="100000">
+                                          <p:val>
+                                            <p:strVal val="ppt_h"/>
+                                          </p:val>
+                                        </p:tav>
+                                      </p:tavLst>
+                                    </p:anim>
+                                    <p:set>
+                                      <p:cBhvr>
+                                        <p:cTn id="73" dur="1" fill="hold">
+                                          <p:stCondLst>
+                                            <p:cond delay="1249"/>
+                                          </p:stCondLst>
+                                        </p:cTn>
+                                        <p:tgtEl>
+                                          <p:spTgt spid="24"/>
+                                        </p:tgtEl>
+                                        <p:attrNameLst>
+                                          <p:attrName>style.visibility</p:attrName>
+                                        </p:attrNameLst>
+                                      </p:cBhvr>
+                                      <p:to>
+                                        <p:strVal val="hidden"/>
+                                      </p:to>
+                                    </p:set>
+                                  </p:childTnLst>
+                                </p:cTn>
+                              </p:par>
+                            </p:childTnLst>
+                          </p:cTn>
+                        </p:par>
+                      </p:childTnLst>
+                    </p:cTn>
+                  </p:par>
+                </p:childTnLst>
+              </p:cTn>
+              <p:prevCondLst>
+                <p:cond evt="onPrev" delay="0">
+                  <p:tgtEl>
+                    <p:sldTgt/>
+                  </p:tgtEl>
+                </p:cond>
+              </p:prevCondLst>
+              <p:nextCondLst>
+                <p:cond evt="onNext" delay="0">
+                  <p:tgtEl>
+                    <p:sldTgt/>
+                  </p:tgtEl>
+                </p:cond>
+              </p:nextCondLst>
+            </p:seq>
+          </p:childTnLst>
+        </p:cTn>
+      </p:par>
+    </p:tnLst>
+  </p:timing>
 </p:sld>
 </file>
 
@@ -3626,10 +5248,10 @@
       </p:pic>
       <p:pic>
         <p:nvPicPr>
-          <p:cNvPr id="9" name="Imagem 8">
+          <p:cNvPr id="16" name="Imagem 15">
             <a:extLst>
               <a:ext uri="{FF2B5EF4-FFF2-40B4-BE49-F238E27FC236}">
-                <a16:creationId xmlns:a16="http://schemas.microsoft.com/office/drawing/2014/main" id="{89EE0806-5794-1579-4A77-8149577044A4}"/>
+                <a16:creationId xmlns:a16="http://schemas.microsoft.com/office/drawing/2014/main" id="{791FB771-2DE7-3423-E2F8-B72DCB816C19}"/>
               </a:ext>
             </a:extLst>
           </p:cNvPr>
@@ -3652,8 +5274,8 @@
         </p:blipFill>
         <p:spPr>
           <a:xfrm>
-            <a:off x="4848862" y="39639"/>
-            <a:ext cx="1164566" cy="1360582"/>
+            <a:off x="291832" y="65009"/>
+            <a:ext cx="2254935" cy="1277529"/>
           </a:xfrm>
           <a:prstGeom prst="rect">
             <a:avLst/>
@@ -3662,10 +5284,10 @@
       </p:pic>
       <p:pic>
         <p:nvPicPr>
-          <p:cNvPr id="16" name="Imagem 15">
+          <p:cNvPr id="6" name="Imagem 5">
             <a:extLst>
               <a:ext uri="{FF2B5EF4-FFF2-40B4-BE49-F238E27FC236}">
-                <a16:creationId xmlns:a16="http://schemas.microsoft.com/office/drawing/2014/main" id="{791FB771-2DE7-3423-E2F8-B72DCB816C19}"/>
+                <a16:creationId xmlns:a16="http://schemas.microsoft.com/office/drawing/2014/main" id="{429343B5-8959-2A5C-FC34-F7B6447A096D}"/>
               </a:ext>
             </a:extLst>
           </p:cNvPr>
@@ -3682,50 +5304,82 @@
               </a:ext>
             </a:extLst>
           </a:blip>
+          <a:srcRect b="6451"/>
           <a:stretch>
             <a:fillRect/>
           </a:stretch>
         </p:blipFill>
         <p:spPr>
           <a:xfrm>
-            <a:off x="291832" y="102435"/>
-            <a:ext cx="2203456" cy="1240103"/>
+            <a:off x="4913652" y="0"/>
+            <a:ext cx="1317408" cy="1439863"/>
           </a:xfrm>
           <a:prstGeom prst="rect">
             <a:avLst/>
           </a:prstGeom>
         </p:spPr>
       </p:pic>
-      <p:sp>
-        <p:nvSpPr>
-          <p:cNvPr id="18" name="CaixaDeTexto 17">
+      <p:grpSp>
+        <p:nvGrpSpPr>
+          <p:cNvPr id="8" name="Agrupar 7">
             <a:extLst>
               <a:ext uri="{FF2B5EF4-FFF2-40B4-BE49-F238E27FC236}">
-                <a16:creationId xmlns:a16="http://schemas.microsoft.com/office/drawing/2014/main" id="{19B4CBAA-0C8C-B44D-B742-E64C95ACDB1C}"/>
+                <a16:creationId xmlns:a16="http://schemas.microsoft.com/office/drawing/2014/main" id="{41A23DE2-7C14-9F6F-E33D-AD68F216518F}"/>
               </a:ext>
             </a:extLst>
           </p:cNvPr>
-          <p:cNvSpPr txBox="1"/>
+          <p:cNvGrpSpPr/>
           <p:nvPr/>
-        </p:nvSpPr>
-        <p:spPr>
+        </p:nvGrpSpPr>
+        <p:grpSpPr>
           <a:xfrm>
-            <a:off x="2569076" y="72836"/>
-            <a:ext cx="752475" cy="307777"/>
+            <a:off x="2782933" y="39640"/>
+            <a:ext cx="1931486" cy="1285048"/>
+            <a:chOff x="2569076" y="72836"/>
+            <a:chExt cx="1931486" cy="1285048"/>
           </a:xfrm>
-          <a:prstGeom prst="rect">
-            <a:avLst/>
-          </a:prstGeom>
-          <a:noFill/>
-        </p:spPr>
-        <p:txBody>
-          <a:bodyPr wrap="square" rtlCol="0">
-            <a:spAutoFit/>
-          </a:bodyPr>
-          <a:lstStyle/>
-          <a:p>
-            <a:r>
-              <a:rPr lang="pt-BR" sz="1400" b="1" dirty="0">
+        </p:grpSpPr>
+        <p:sp>
+          <p:nvSpPr>
+            <p:cNvPr id="10" name="CaixaDeTexto 9">
+              <a:extLst>
+                <a:ext uri="{FF2B5EF4-FFF2-40B4-BE49-F238E27FC236}">
+                  <a16:creationId xmlns:a16="http://schemas.microsoft.com/office/drawing/2014/main" id="{021D66A3-84DA-29B7-79BE-F6FA91CDCBFD}"/>
+                </a:ext>
+              </a:extLst>
+            </p:cNvPr>
+            <p:cNvSpPr txBox="1"/>
+            <p:nvPr/>
+          </p:nvSpPr>
+          <p:spPr>
+            <a:xfrm>
+              <a:off x="2569076" y="72836"/>
+              <a:ext cx="752475" cy="307777"/>
+            </a:xfrm>
+            <a:prstGeom prst="rect">
+              <a:avLst/>
+            </a:prstGeom>
+            <a:noFill/>
+          </p:spPr>
+          <p:txBody>
+            <a:bodyPr wrap="square" rtlCol="0">
+              <a:spAutoFit/>
+            </a:bodyPr>
+            <a:lstStyle/>
+            <a:p>
+              <a:r>
+                <a:rPr lang="pt-BR" sz="1400" b="1" dirty="0">
+                  <a:solidFill>
+                    <a:schemeClr val="bg1"/>
+                  </a:solidFill>
+                  <a:effectLst>
+                    <a:reflection blurRad="6350" stA="55000" endA="300" endPos="45500" dir="5400000" sy="-100000" algn="bl" rotWithShape="0"/>
+                  </a:effectLst>
+                  <a:latin typeface="Arial Rounded MT Bold" panose="020F0704030504030204" pitchFamily="34" charset="0"/>
+                </a:rPr>
+                <a:t>Pediu</a:t>
+              </a:r>
+              <a:endParaRPr lang="pt-BR" sz="2000" b="1" dirty="0">
                 <a:solidFill>
                   <a:schemeClr val="bg1"/>
                 </a:solidFill>
@@ -3733,51 +5387,51 @@
                   <a:reflection blurRad="6350" stA="55000" endA="300" endPos="45500" dir="5400000" sy="-100000" algn="bl" rotWithShape="0"/>
                 </a:effectLst>
                 <a:latin typeface="Arial Rounded MT Bold" panose="020F0704030504030204" pitchFamily="34" charset="0"/>
-              </a:rPr>
-              <a:t>Pediu</a:t>
-            </a:r>
-            <a:endParaRPr lang="pt-BR" sz="2000" b="1" dirty="0">
-              <a:solidFill>
-                <a:schemeClr val="bg1"/>
-              </a:solidFill>
-              <a:effectLst>
-                <a:reflection blurRad="6350" stA="55000" endA="300" endPos="45500" dir="5400000" sy="-100000" algn="bl" rotWithShape="0"/>
-              </a:effectLst>
-              <a:latin typeface="Arial Rounded MT Bold" panose="020F0704030504030204" pitchFamily="34" charset="0"/>
-            </a:endParaRPr>
-          </a:p>
-        </p:txBody>
-      </p:sp>
-      <p:sp>
-        <p:nvSpPr>
-          <p:cNvPr id="20" name="CaixaDeTexto 19">
-            <a:extLst>
-              <a:ext uri="{FF2B5EF4-FFF2-40B4-BE49-F238E27FC236}">
-                <a16:creationId xmlns:a16="http://schemas.microsoft.com/office/drawing/2014/main" id="{BEB96AEC-A531-DD70-A4CD-37A112F91652}"/>
-              </a:ext>
-            </a:extLst>
-          </p:cNvPr>
-          <p:cNvSpPr txBox="1"/>
-          <p:nvPr/>
-        </p:nvSpPr>
-        <p:spPr>
-          <a:xfrm>
-            <a:off x="2772496" y="261748"/>
-            <a:ext cx="1391373" cy="338554"/>
-          </a:xfrm>
-          <a:prstGeom prst="rect">
-            <a:avLst/>
-          </a:prstGeom>
-          <a:noFill/>
-        </p:spPr>
-        <p:txBody>
-          <a:bodyPr wrap="square" rtlCol="0">
-            <a:spAutoFit/>
-          </a:bodyPr>
-          <a:lstStyle/>
-          <a:p>
-            <a:r>
-              <a:rPr lang="pt-BR" sz="1600" dirty="0">
+              </a:endParaRPr>
+            </a:p>
+          </p:txBody>
+        </p:sp>
+        <p:sp>
+          <p:nvSpPr>
+            <p:cNvPr id="11" name="CaixaDeTexto 10">
+              <a:extLst>
+                <a:ext uri="{FF2B5EF4-FFF2-40B4-BE49-F238E27FC236}">
+                  <a16:creationId xmlns:a16="http://schemas.microsoft.com/office/drawing/2014/main" id="{428DC748-C9FD-C9B6-86DD-E67C26A2DB99}"/>
+                </a:ext>
+              </a:extLst>
+            </p:cNvPr>
+            <p:cNvSpPr txBox="1"/>
+            <p:nvPr/>
+          </p:nvSpPr>
+          <p:spPr>
+            <a:xfrm>
+              <a:off x="2772496" y="261748"/>
+              <a:ext cx="1391373" cy="338554"/>
+            </a:xfrm>
+            <a:prstGeom prst="rect">
+              <a:avLst/>
+            </a:prstGeom>
+            <a:noFill/>
+          </p:spPr>
+          <p:txBody>
+            <a:bodyPr wrap="square" rtlCol="0">
+              <a:spAutoFit/>
+            </a:bodyPr>
+            <a:lstStyle/>
+            <a:p>
+              <a:r>
+                <a:rPr lang="pt-BR" sz="1600" dirty="0">
+                  <a:solidFill>
+                    <a:schemeClr val="bg1"/>
+                  </a:solidFill>
+                  <a:effectLst>
+                    <a:reflection blurRad="6350" stA="55000" endA="300" endPos="45500" dir="5400000" sy="-100000" algn="bl" rotWithShape="0"/>
+                  </a:effectLst>
+                  <a:latin typeface="Arial Rounded MT Bold" panose="020F0704030504030204" pitchFamily="34" charset="0"/>
+                </a:rPr>
+                <a:t>Cantando</a:t>
+              </a:r>
+              <a:endParaRPr lang="pt-BR" dirty="0">
                 <a:solidFill>
                   <a:schemeClr val="bg1"/>
                 </a:solidFill>
@@ -3785,51 +5439,94 @@
                   <a:reflection blurRad="6350" stA="55000" endA="300" endPos="45500" dir="5400000" sy="-100000" algn="bl" rotWithShape="0"/>
                 </a:effectLst>
                 <a:latin typeface="Arial Rounded MT Bold" panose="020F0704030504030204" pitchFamily="34" charset="0"/>
-              </a:rPr>
-              <a:t>Cantando</a:t>
-            </a:r>
-            <a:endParaRPr lang="pt-BR" dirty="0">
-              <a:solidFill>
-                <a:schemeClr val="bg1"/>
-              </a:solidFill>
-              <a:effectLst>
-                <a:reflection blurRad="6350" stA="55000" endA="300" endPos="45500" dir="5400000" sy="-100000" algn="bl" rotWithShape="0"/>
-              </a:effectLst>
-              <a:latin typeface="Arial Rounded MT Bold" panose="020F0704030504030204" pitchFamily="34" charset="0"/>
-            </a:endParaRPr>
-          </a:p>
-        </p:txBody>
-      </p:sp>
-      <p:sp>
-        <p:nvSpPr>
-          <p:cNvPr id="22" name="CaixaDeTexto 21">
-            <a:extLst>
-              <a:ext uri="{FF2B5EF4-FFF2-40B4-BE49-F238E27FC236}">
-                <a16:creationId xmlns:a16="http://schemas.microsoft.com/office/drawing/2014/main" id="{198601A6-2A0F-1A99-9410-7F1F7E2BFB56}"/>
-              </a:ext>
-            </a:extLst>
-          </p:cNvPr>
-          <p:cNvSpPr txBox="1"/>
-          <p:nvPr/>
-        </p:nvSpPr>
-        <p:spPr>
-          <a:xfrm>
-            <a:off x="2603705" y="466690"/>
-            <a:ext cx="738188" cy="338554"/>
-          </a:xfrm>
-          <a:prstGeom prst="rect">
-            <a:avLst/>
-          </a:prstGeom>
-          <a:noFill/>
-        </p:spPr>
-        <p:txBody>
-          <a:bodyPr wrap="square" rtlCol="0">
-            <a:spAutoFit/>
-          </a:bodyPr>
-          <a:lstStyle/>
-          <a:p>
-            <a:r>
-              <a:rPr lang="pt-BR" sz="1600" dirty="0">
+              </a:endParaRPr>
+            </a:p>
+          </p:txBody>
+        </p:sp>
+        <p:sp>
+          <p:nvSpPr>
+            <p:cNvPr id="13" name="CaixaDeTexto 12">
+              <a:extLst>
+                <a:ext uri="{FF2B5EF4-FFF2-40B4-BE49-F238E27FC236}">
+                  <a16:creationId xmlns:a16="http://schemas.microsoft.com/office/drawing/2014/main" id="{3FF7F38C-04CF-F19B-B445-67E6B2C38D37}"/>
+                </a:ext>
+              </a:extLst>
+            </p:cNvPr>
+            <p:cNvSpPr txBox="1"/>
+            <p:nvPr/>
+          </p:nvSpPr>
+          <p:spPr>
+            <a:xfrm>
+              <a:off x="2603705" y="466690"/>
+              <a:ext cx="738188" cy="338554"/>
+            </a:xfrm>
+            <a:prstGeom prst="rect">
+              <a:avLst/>
+            </a:prstGeom>
+            <a:noFill/>
+          </p:spPr>
+          <p:txBody>
+            <a:bodyPr wrap="square" rtlCol="0">
+              <a:spAutoFit/>
+            </a:bodyPr>
+            <a:lstStyle/>
+            <a:p>
+              <a:r>
+                <a:rPr lang="pt-BR" sz="1600" dirty="0">
+                  <a:solidFill>
+                    <a:schemeClr val="bg1"/>
+                  </a:solidFill>
+                  <a:effectLst>
+                    <a:reflection blurRad="6350" stA="55000" endA="300" endPos="45500" dir="5400000" sy="-100000" algn="bl" rotWithShape="0"/>
+                  </a:effectLst>
+                  <a:latin typeface="Arial Rounded MT Bold" panose="020F0704030504030204" pitchFamily="34" charset="0"/>
+                </a:rPr>
+                <a:t>Saiu</a:t>
+              </a:r>
+            </a:p>
+          </p:txBody>
+        </p:sp>
+        <p:sp>
+          <p:nvSpPr>
+            <p:cNvPr id="14" name="CaixaDeTexto 13">
+              <a:extLst>
+                <a:ext uri="{FF2B5EF4-FFF2-40B4-BE49-F238E27FC236}">
+                  <a16:creationId xmlns:a16="http://schemas.microsoft.com/office/drawing/2014/main" id="{788B3874-50B1-A7B6-C54B-14884C933711}"/>
+                </a:ext>
+              </a:extLst>
+            </p:cNvPr>
+            <p:cNvSpPr txBox="1"/>
+            <p:nvPr/>
+          </p:nvSpPr>
+          <p:spPr>
+            <a:xfrm>
+              <a:off x="2794288" y="683600"/>
+              <a:ext cx="1347787" cy="338554"/>
+            </a:xfrm>
+            <a:prstGeom prst="rect">
+              <a:avLst/>
+            </a:prstGeom>
+            <a:noFill/>
+          </p:spPr>
+          <p:txBody>
+            <a:bodyPr wrap="square" rtlCol="0">
+              <a:spAutoFit/>
+            </a:bodyPr>
+            <a:lstStyle/>
+            <a:p>
+              <a:r>
+                <a:rPr lang="pt-BR" sz="1600" dirty="0">
+                  <a:solidFill>
+                    <a:schemeClr val="bg1"/>
+                  </a:solidFill>
+                  <a:effectLst>
+                    <a:reflection blurRad="6350" stA="55000" endA="300" endPos="45500" dir="5400000" sy="-100000" algn="bl" rotWithShape="0"/>
+                  </a:effectLst>
+                  <a:latin typeface="Arial Rounded MT Bold" panose="020F0704030504030204" pitchFamily="34" charset="0"/>
+                </a:rPr>
+                <a:t>Ganhando</a:t>
+              </a:r>
+              <a:endParaRPr lang="pt-BR" dirty="0">
                 <a:solidFill>
                   <a:schemeClr val="bg1"/>
                 </a:solidFill>
@@ -3837,104 +5534,51 @@
                   <a:reflection blurRad="6350" stA="55000" endA="300" endPos="45500" dir="5400000" sy="-100000" algn="bl" rotWithShape="0"/>
                 </a:effectLst>
                 <a:latin typeface="Arial Rounded MT Bold" panose="020F0704030504030204" pitchFamily="34" charset="0"/>
-              </a:rPr>
-              <a:t>Saiu</a:t>
-            </a:r>
-          </a:p>
-        </p:txBody>
-      </p:sp>
-      <p:sp>
-        <p:nvSpPr>
-          <p:cNvPr id="24" name="CaixaDeTexto 23">
-            <a:extLst>
-              <a:ext uri="{FF2B5EF4-FFF2-40B4-BE49-F238E27FC236}">
-                <a16:creationId xmlns:a16="http://schemas.microsoft.com/office/drawing/2014/main" id="{74E899AA-61CE-85F9-B7B4-1D986B06CA92}"/>
-              </a:ext>
-            </a:extLst>
-          </p:cNvPr>
-          <p:cNvSpPr txBox="1"/>
-          <p:nvPr/>
-        </p:nvSpPr>
-        <p:spPr>
-          <a:xfrm>
-            <a:off x="2794288" y="683600"/>
-            <a:ext cx="1347787" cy="338554"/>
-          </a:xfrm>
-          <a:prstGeom prst="rect">
-            <a:avLst/>
-          </a:prstGeom>
-          <a:noFill/>
-        </p:spPr>
-        <p:txBody>
-          <a:bodyPr wrap="square" rtlCol="0">
-            <a:spAutoFit/>
-          </a:bodyPr>
-          <a:lstStyle/>
-          <a:p>
-            <a:r>
-              <a:rPr lang="pt-BR" sz="1600" dirty="0">
-                <a:solidFill>
-                  <a:schemeClr val="bg1"/>
-                </a:solidFill>
-                <a:effectLst>
-                  <a:reflection blurRad="6350" stA="55000" endA="300" endPos="45500" dir="5400000" sy="-100000" algn="bl" rotWithShape="0"/>
-                </a:effectLst>
-                <a:latin typeface="Arial Rounded MT Bold" panose="020F0704030504030204" pitchFamily="34" charset="0"/>
-              </a:rPr>
-              <a:t>Ganhando</a:t>
-            </a:r>
-            <a:endParaRPr lang="pt-BR" dirty="0">
-              <a:solidFill>
-                <a:schemeClr val="bg1"/>
-              </a:solidFill>
-              <a:effectLst>
-                <a:reflection blurRad="6350" stA="55000" endA="300" endPos="45500" dir="5400000" sy="-100000" algn="bl" rotWithShape="0"/>
-              </a:effectLst>
-              <a:latin typeface="Arial Rounded MT Bold" panose="020F0704030504030204" pitchFamily="34" charset="0"/>
-            </a:endParaRPr>
-          </a:p>
-        </p:txBody>
-      </p:sp>
-      <p:sp>
-        <p:nvSpPr>
-          <p:cNvPr id="26" name="CaixaDeTexto 25">
-            <a:extLst>
-              <a:ext uri="{FF2B5EF4-FFF2-40B4-BE49-F238E27FC236}">
-                <a16:creationId xmlns:a16="http://schemas.microsoft.com/office/drawing/2014/main" id="{8F3BCEB3-337F-1498-A4D1-97B45EA97D90}"/>
-              </a:ext>
-            </a:extLst>
-          </p:cNvPr>
-          <p:cNvSpPr txBox="1"/>
-          <p:nvPr/>
-        </p:nvSpPr>
-        <p:spPr>
-          <a:xfrm>
-            <a:off x="2647949" y="988552"/>
-            <a:ext cx="1852613" cy="369332"/>
-          </a:xfrm>
-          <a:prstGeom prst="rect">
-            <a:avLst/>
-          </a:prstGeom>
-          <a:noFill/>
-        </p:spPr>
-        <p:txBody>
-          <a:bodyPr wrap="square" rtlCol="0">
-            <a:spAutoFit/>
-          </a:bodyPr>
-          <a:lstStyle/>
-          <a:p>
-            <a:r>
-              <a:rPr lang="pt-BR" dirty="0">
-                <a:solidFill>
-                  <a:schemeClr val="bg1"/>
-                </a:solidFill>
-                <a:latin typeface="Arial Rounded MT Bold" panose="020F0704030504030204" pitchFamily="34" charset="0"/>
-              </a:rPr>
-              <a:t>No drive-tudo</a:t>
-            </a:r>
-          </a:p>
-        </p:txBody>
-      </p:sp>
+              </a:endParaRPr>
+            </a:p>
+          </p:txBody>
+        </p:sp>
+        <p:sp>
+          <p:nvSpPr>
+            <p:cNvPr id="15" name="CaixaDeTexto 14">
+              <a:extLst>
+                <a:ext uri="{FF2B5EF4-FFF2-40B4-BE49-F238E27FC236}">
+                  <a16:creationId xmlns:a16="http://schemas.microsoft.com/office/drawing/2014/main" id="{5CF1E49C-0538-85EA-D958-EA92C5D25BEE}"/>
+                </a:ext>
+              </a:extLst>
+            </p:cNvPr>
+            <p:cNvSpPr txBox="1"/>
+            <p:nvPr/>
+          </p:nvSpPr>
+          <p:spPr>
+            <a:xfrm>
+              <a:off x="2647949" y="988552"/>
+              <a:ext cx="1852613" cy="369332"/>
+            </a:xfrm>
+            <a:prstGeom prst="rect">
+              <a:avLst/>
+            </a:prstGeom>
+            <a:noFill/>
+          </p:spPr>
+          <p:txBody>
+            <a:bodyPr wrap="square" rtlCol="0">
+              <a:spAutoFit/>
+            </a:bodyPr>
+            <a:lstStyle/>
+            <a:p>
+              <a:r>
+                <a:rPr lang="pt-BR" dirty="0">
+                  <a:solidFill>
+                    <a:schemeClr val="bg1"/>
+                  </a:solidFill>
+                  <a:latin typeface="Arial Rounded MT Bold" panose="020F0704030504030204" pitchFamily="34" charset="0"/>
+                </a:rPr>
+                <a:t>No drive-tudo</a:t>
+              </a:r>
+            </a:p>
+          </p:txBody>
+        </p:sp>
+      </p:grpSp>
     </p:spTree>
     <p:extLst>
       <p:ext uri="{BB962C8B-B14F-4D97-AF65-F5344CB8AC3E}">
@@ -3945,6 +5589,677 @@
   <p:clrMapOvr>
     <a:masterClrMapping/>
   </p:clrMapOvr>
+  <p:timing>
+    <p:tnLst>
+      <p:par>
+        <p:cTn id="1" dur="indefinite" restart="never" nodeType="tmRoot">
+          <p:childTnLst>
+            <p:seq concurrent="1" nextAc="seek">
+              <p:cTn id="2" dur="indefinite" nodeType="mainSeq">
+                <p:childTnLst>
+                  <p:par>
+                    <p:cTn id="3" fill="hold">
+                      <p:stCondLst>
+                        <p:cond delay="indefinite"/>
+                        <p:cond evt="onBegin" delay="0">
+                          <p:tn val="2"/>
+                        </p:cond>
+                      </p:stCondLst>
+                      <p:childTnLst>
+                        <p:par>
+                          <p:cTn id="4" fill="hold">
+                            <p:stCondLst>
+                              <p:cond delay="0"/>
+                            </p:stCondLst>
+                            <p:childTnLst>
+                              <p:par>
+                                <p:cTn id="5" presetID="14" presetClass="entr" presetSubtype="10" fill="hold" nodeType="withEffect">
+                                  <p:stCondLst>
+                                    <p:cond delay="1000"/>
+                                  </p:stCondLst>
+                                  <p:childTnLst>
+                                    <p:set>
+                                      <p:cBhvr>
+                                        <p:cTn id="6" dur="1" fill="hold">
+                                          <p:stCondLst>
+                                            <p:cond delay="0"/>
+                                          </p:stCondLst>
+                                        </p:cTn>
+                                        <p:tgtEl>
+                                          <p:spTgt spid="16"/>
+                                        </p:tgtEl>
+                                        <p:attrNameLst>
+                                          <p:attrName>style.visibility</p:attrName>
+                                        </p:attrNameLst>
+                                      </p:cBhvr>
+                                      <p:to>
+                                        <p:strVal val="visible"/>
+                                      </p:to>
+                                    </p:set>
+                                    <p:animEffect transition="in" filter="randombar(horizontal)">
+                                      <p:cBhvr>
+                                        <p:cTn id="7" dur="3000"/>
+                                        <p:tgtEl>
+                                          <p:spTgt spid="16"/>
+                                        </p:tgtEl>
+                                      </p:cBhvr>
+                                    </p:animEffect>
+                                  </p:childTnLst>
+                                </p:cTn>
+                              </p:par>
+                            </p:childTnLst>
+                          </p:cTn>
+                        </p:par>
+                        <p:par>
+                          <p:cTn id="8" fill="hold">
+                            <p:stCondLst>
+                              <p:cond delay="4000"/>
+                            </p:stCondLst>
+                            <p:childTnLst>
+                              <p:par>
+                                <p:cTn id="9" presetID="42" presetClass="entr" presetSubtype="0" fill="hold" nodeType="afterEffect">
+                                  <p:stCondLst>
+                                    <p:cond delay="0"/>
+                                  </p:stCondLst>
+                                  <p:childTnLst>
+                                    <p:set>
+                                      <p:cBhvr>
+                                        <p:cTn id="10" dur="1" fill="hold">
+                                          <p:stCondLst>
+                                            <p:cond delay="0"/>
+                                          </p:stCondLst>
+                                        </p:cTn>
+                                        <p:tgtEl>
+                                          <p:spTgt spid="8"/>
+                                        </p:tgtEl>
+                                        <p:attrNameLst>
+                                          <p:attrName>style.visibility</p:attrName>
+                                        </p:attrNameLst>
+                                      </p:cBhvr>
+                                      <p:to>
+                                        <p:strVal val="visible"/>
+                                      </p:to>
+                                    </p:set>
+                                    <p:animEffect transition="in" filter="fade">
+                                      <p:cBhvr>
+                                        <p:cTn id="11" dur="1250"/>
+                                        <p:tgtEl>
+                                          <p:spTgt spid="8"/>
+                                        </p:tgtEl>
+                                      </p:cBhvr>
+                                    </p:animEffect>
+                                    <p:anim calcmode="lin" valueType="num">
+                                      <p:cBhvr>
+                                        <p:cTn id="12" dur="1250" fill="hold"/>
+                                        <p:tgtEl>
+                                          <p:spTgt spid="8"/>
+                                        </p:tgtEl>
+                                        <p:attrNameLst>
+                                          <p:attrName>ppt_x</p:attrName>
+                                        </p:attrNameLst>
+                                      </p:cBhvr>
+                                      <p:tavLst>
+                                        <p:tav tm="0">
+                                          <p:val>
+                                            <p:strVal val="#ppt_x"/>
+                                          </p:val>
+                                        </p:tav>
+                                        <p:tav tm="100000">
+                                          <p:val>
+                                            <p:strVal val="#ppt_x"/>
+                                          </p:val>
+                                        </p:tav>
+                                      </p:tavLst>
+                                    </p:anim>
+                                    <p:anim calcmode="lin" valueType="num">
+                                      <p:cBhvr>
+                                        <p:cTn id="13" dur="1250" fill="hold"/>
+                                        <p:tgtEl>
+                                          <p:spTgt spid="8"/>
+                                        </p:tgtEl>
+                                        <p:attrNameLst>
+                                          <p:attrName>ppt_y</p:attrName>
+                                        </p:attrNameLst>
+                                      </p:cBhvr>
+                                      <p:tavLst>
+                                        <p:tav tm="0">
+                                          <p:val>
+                                            <p:strVal val="#ppt_y+.1"/>
+                                          </p:val>
+                                        </p:tav>
+                                        <p:tav tm="100000">
+                                          <p:val>
+                                            <p:strVal val="#ppt_y"/>
+                                          </p:val>
+                                        </p:tav>
+                                      </p:tavLst>
+                                    </p:anim>
+                                  </p:childTnLst>
+                                </p:cTn>
+                              </p:par>
+                            </p:childTnLst>
+                          </p:cTn>
+                        </p:par>
+                        <p:par>
+                          <p:cTn id="14" fill="hold">
+                            <p:stCondLst>
+                              <p:cond delay="5250"/>
+                            </p:stCondLst>
+                            <p:childTnLst>
+                              <p:par>
+                                <p:cTn id="15" presetID="42" presetClass="entr" presetSubtype="0" fill="hold" nodeType="afterEffect">
+                                  <p:stCondLst>
+                                    <p:cond delay="0"/>
+                                  </p:stCondLst>
+                                  <p:childTnLst>
+                                    <p:set>
+                                      <p:cBhvr>
+                                        <p:cTn id="16" dur="1" fill="hold">
+                                          <p:stCondLst>
+                                            <p:cond delay="0"/>
+                                          </p:stCondLst>
+                                        </p:cTn>
+                                        <p:tgtEl>
+                                          <p:spTgt spid="6"/>
+                                        </p:tgtEl>
+                                        <p:attrNameLst>
+                                          <p:attrName>style.visibility</p:attrName>
+                                        </p:attrNameLst>
+                                      </p:cBhvr>
+                                      <p:to>
+                                        <p:strVal val="visible"/>
+                                      </p:to>
+                                    </p:set>
+                                    <p:animEffect transition="in" filter="fade">
+                                      <p:cBhvr>
+                                        <p:cTn id="17" dur="1250"/>
+                                        <p:tgtEl>
+                                          <p:spTgt spid="6"/>
+                                        </p:tgtEl>
+                                      </p:cBhvr>
+                                    </p:animEffect>
+                                    <p:anim calcmode="lin" valueType="num">
+                                      <p:cBhvr>
+                                        <p:cTn id="18" dur="1250" fill="hold"/>
+                                        <p:tgtEl>
+                                          <p:spTgt spid="6"/>
+                                        </p:tgtEl>
+                                        <p:attrNameLst>
+                                          <p:attrName>ppt_x</p:attrName>
+                                        </p:attrNameLst>
+                                      </p:cBhvr>
+                                      <p:tavLst>
+                                        <p:tav tm="0">
+                                          <p:val>
+                                            <p:strVal val="#ppt_x"/>
+                                          </p:val>
+                                        </p:tav>
+                                        <p:tav tm="100000">
+                                          <p:val>
+                                            <p:strVal val="#ppt_x"/>
+                                          </p:val>
+                                        </p:tav>
+                                      </p:tavLst>
+                                    </p:anim>
+                                    <p:anim calcmode="lin" valueType="num">
+                                      <p:cBhvr>
+                                        <p:cTn id="19" dur="1250" fill="hold"/>
+                                        <p:tgtEl>
+                                          <p:spTgt spid="6"/>
+                                        </p:tgtEl>
+                                        <p:attrNameLst>
+                                          <p:attrName>ppt_y</p:attrName>
+                                        </p:attrNameLst>
+                                      </p:cBhvr>
+                                      <p:tavLst>
+                                        <p:tav tm="0">
+                                          <p:val>
+                                            <p:strVal val="#ppt_y+.1"/>
+                                          </p:val>
+                                        </p:tav>
+                                        <p:tav tm="100000">
+                                          <p:val>
+                                            <p:strVal val="#ppt_y"/>
+                                          </p:val>
+                                        </p:tav>
+                                      </p:tavLst>
+                                    </p:anim>
+                                  </p:childTnLst>
+                                </p:cTn>
+                              </p:par>
+                            </p:childTnLst>
+                          </p:cTn>
+                        </p:par>
+                        <p:par>
+                          <p:cTn id="20" fill="hold">
+                            <p:stCondLst>
+                              <p:cond delay="6500"/>
+                            </p:stCondLst>
+                            <p:childTnLst>
+                              <p:par>
+                                <p:cTn id="21" presetID="10" presetClass="exit" presetSubtype="0" fill="hold" nodeType="afterEffect">
+                                  <p:stCondLst>
+                                    <p:cond delay="4000"/>
+                                  </p:stCondLst>
+                                  <p:childTnLst>
+                                    <p:animEffect transition="out" filter="fade">
+                                      <p:cBhvr>
+                                        <p:cTn id="22" dur="1250"/>
+                                        <p:tgtEl>
+                                          <p:spTgt spid="16"/>
+                                        </p:tgtEl>
+                                      </p:cBhvr>
+                                    </p:animEffect>
+                                    <p:set>
+                                      <p:cBhvr>
+                                        <p:cTn id="23" dur="1" fill="hold">
+                                          <p:stCondLst>
+                                            <p:cond delay="1249"/>
+                                          </p:stCondLst>
+                                        </p:cTn>
+                                        <p:tgtEl>
+                                          <p:spTgt spid="16"/>
+                                        </p:tgtEl>
+                                        <p:attrNameLst>
+                                          <p:attrName>style.visibility</p:attrName>
+                                        </p:attrNameLst>
+                                      </p:cBhvr>
+                                      <p:to>
+                                        <p:strVal val="hidden"/>
+                                      </p:to>
+                                    </p:set>
+                                  </p:childTnLst>
+                                </p:cTn>
+                              </p:par>
+                            </p:childTnLst>
+                          </p:cTn>
+                        </p:par>
+                        <p:par>
+                          <p:cTn id="24" fill="hold">
+                            <p:stCondLst>
+                              <p:cond delay="11750"/>
+                            </p:stCondLst>
+                            <p:childTnLst>
+                              <p:par>
+                                <p:cTn id="25" presetID="45" presetClass="exit" presetSubtype="0" fill="hold" nodeType="afterEffect">
+                                  <p:stCondLst>
+                                    <p:cond delay="0"/>
+                                  </p:stCondLst>
+                                  <p:childTnLst>
+                                    <p:animEffect transition="out" filter="fade">
+                                      <p:cBhvr>
+                                        <p:cTn id="26" dur="1250"/>
+                                        <p:tgtEl>
+                                          <p:spTgt spid="8"/>
+                                        </p:tgtEl>
+                                      </p:cBhvr>
+                                    </p:animEffect>
+                                    <p:anim calcmode="lin" valueType="num">
+                                      <p:cBhvr>
+                                        <p:cTn id="27" dur="1250"/>
+                                        <p:tgtEl>
+                                          <p:spTgt spid="8"/>
+                                        </p:tgtEl>
+                                        <p:attrNameLst>
+                                          <p:attrName>ppt_w</p:attrName>
+                                        </p:attrNameLst>
+                                      </p:cBhvr>
+                                      <p:tavLst>
+                                        <p:tav tm="0">
+                                          <p:val>
+                                            <p:strVal val="ppt_w"/>
+                                          </p:val>
+                                        </p:tav>
+                                        <p:tav tm="5000">
+                                          <p:val>
+                                            <p:strVal val="0.92*ppt_w"/>
+                                          </p:val>
+                                        </p:tav>
+                                        <p:tav tm="10000">
+                                          <p:val>
+                                            <p:strVal val="0.71*ppt_w"/>
+                                          </p:val>
+                                        </p:tav>
+                                        <p:tav tm="15000">
+                                          <p:val>
+                                            <p:strVal val="0.38*ppt_w"/>
+                                          </p:val>
+                                        </p:tav>
+                                        <p:tav tm="20000">
+                                          <p:val>
+                                            <p:fltVal val="0"/>
+                                          </p:val>
+                                        </p:tav>
+                                        <p:tav tm="25000">
+                                          <p:val>
+                                            <p:strVal val="-0.38*ppt_w"/>
+                                          </p:val>
+                                        </p:tav>
+                                        <p:tav tm="30000">
+                                          <p:val>
+                                            <p:strVal val="-0.71*ppt_w"/>
+                                          </p:val>
+                                        </p:tav>
+                                        <p:tav tm="35000">
+                                          <p:val>
+                                            <p:strVal val="-0.92*ppt_w"/>
+                                          </p:val>
+                                        </p:tav>
+                                        <p:tav tm="40000">
+                                          <p:val>
+                                            <p:strVal val="-ppt_w"/>
+                                          </p:val>
+                                        </p:tav>
+                                        <p:tav tm="45000">
+                                          <p:val>
+                                            <p:strVal val="-0.92*ppt_w"/>
+                                          </p:val>
+                                        </p:tav>
+                                        <p:tav tm="50000">
+                                          <p:val>
+                                            <p:strVal val="-0.71*ppt_w"/>
+                                          </p:val>
+                                        </p:tav>
+                                        <p:tav tm="55000">
+                                          <p:val>
+                                            <p:strVal val="-0.38*ppt_w"/>
+                                          </p:val>
+                                        </p:tav>
+                                        <p:tav tm="60000">
+                                          <p:val>
+                                            <p:fltVal val="0"/>
+                                          </p:val>
+                                        </p:tav>
+                                        <p:tav tm="65000">
+                                          <p:val>
+                                            <p:strVal val="0.38*ppt_w"/>
+                                          </p:val>
+                                        </p:tav>
+                                        <p:tav tm="70000">
+                                          <p:val>
+                                            <p:strVal val="0.71*ppt_w"/>
+                                          </p:val>
+                                        </p:tav>
+                                        <p:tav tm="75000">
+                                          <p:val>
+                                            <p:strVal val="0.92*ppt_w"/>
+                                          </p:val>
+                                        </p:tav>
+                                        <p:tav tm="80000">
+                                          <p:val>
+                                            <p:strVal val="ppt_w"/>
+                                          </p:val>
+                                        </p:tav>
+                                        <p:tav tm="85000">
+                                          <p:val>
+                                            <p:strVal val="0.92*ppt_w"/>
+                                          </p:val>
+                                        </p:tav>
+                                        <p:tav tm="90000">
+                                          <p:val>
+                                            <p:strVal val="0.71*ppt_w"/>
+                                          </p:val>
+                                        </p:tav>
+                                        <p:tav tm="95000">
+                                          <p:val>
+                                            <p:strVal val="0.38*ppt_w"/>
+                                          </p:val>
+                                        </p:tav>
+                                        <p:tav tm="100000">
+                                          <p:val>
+                                            <p:fltVal val="0"/>
+                                          </p:val>
+                                        </p:tav>
+                                      </p:tavLst>
+                                    </p:anim>
+                                    <p:anim calcmode="lin" valueType="num">
+                                      <p:cBhvr>
+                                        <p:cTn id="28" dur="1250"/>
+                                        <p:tgtEl>
+                                          <p:spTgt spid="8"/>
+                                        </p:tgtEl>
+                                        <p:attrNameLst>
+                                          <p:attrName>ppt_h</p:attrName>
+                                        </p:attrNameLst>
+                                      </p:cBhvr>
+                                      <p:tavLst>
+                                        <p:tav tm="0">
+                                          <p:val>
+                                            <p:strVal val="ppt_h"/>
+                                          </p:val>
+                                        </p:tav>
+                                        <p:tav tm="100000">
+                                          <p:val>
+                                            <p:strVal val="ppt_h"/>
+                                          </p:val>
+                                        </p:tav>
+                                      </p:tavLst>
+                                    </p:anim>
+                                    <p:set>
+                                      <p:cBhvr>
+                                        <p:cTn id="29" dur="1" fill="hold">
+                                          <p:stCondLst>
+                                            <p:cond delay="1249"/>
+                                          </p:stCondLst>
+                                        </p:cTn>
+                                        <p:tgtEl>
+                                          <p:spTgt spid="8"/>
+                                        </p:tgtEl>
+                                        <p:attrNameLst>
+                                          <p:attrName>style.visibility</p:attrName>
+                                        </p:attrNameLst>
+                                      </p:cBhvr>
+                                      <p:to>
+                                        <p:strVal val="hidden"/>
+                                      </p:to>
+                                    </p:set>
+                                  </p:childTnLst>
+                                </p:cTn>
+                              </p:par>
+                              <p:par>
+                                <p:cTn id="30" presetID="45" presetClass="exit" presetSubtype="0" fill="hold" nodeType="withEffect">
+                                  <p:stCondLst>
+                                    <p:cond delay="0"/>
+                                  </p:stCondLst>
+                                  <p:childTnLst>
+                                    <p:animEffect transition="out" filter="fade">
+                                      <p:cBhvr>
+                                        <p:cTn id="31" dur="1250"/>
+                                        <p:tgtEl>
+                                          <p:spTgt spid="6"/>
+                                        </p:tgtEl>
+                                      </p:cBhvr>
+                                    </p:animEffect>
+                                    <p:anim calcmode="lin" valueType="num">
+                                      <p:cBhvr>
+                                        <p:cTn id="32" dur="1250"/>
+                                        <p:tgtEl>
+                                          <p:spTgt spid="6"/>
+                                        </p:tgtEl>
+                                        <p:attrNameLst>
+                                          <p:attrName>ppt_w</p:attrName>
+                                        </p:attrNameLst>
+                                      </p:cBhvr>
+                                      <p:tavLst>
+                                        <p:tav tm="0">
+                                          <p:val>
+                                            <p:strVal val="ppt_w"/>
+                                          </p:val>
+                                        </p:tav>
+                                        <p:tav tm="5000">
+                                          <p:val>
+                                            <p:strVal val="0.92*ppt_w"/>
+                                          </p:val>
+                                        </p:tav>
+                                        <p:tav tm="10000">
+                                          <p:val>
+                                            <p:strVal val="0.71*ppt_w"/>
+                                          </p:val>
+                                        </p:tav>
+                                        <p:tav tm="15000">
+                                          <p:val>
+                                            <p:strVal val="0.38*ppt_w"/>
+                                          </p:val>
+                                        </p:tav>
+                                        <p:tav tm="20000">
+                                          <p:val>
+                                            <p:fltVal val="0"/>
+                                          </p:val>
+                                        </p:tav>
+                                        <p:tav tm="25000">
+                                          <p:val>
+                                            <p:strVal val="-0.38*ppt_w"/>
+                                          </p:val>
+                                        </p:tav>
+                                        <p:tav tm="30000">
+                                          <p:val>
+                                            <p:strVal val="-0.71*ppt_w"/>
+                                          </p:val>
+                                        </p:tav>
+                                        <p:tav tm="35000">
+                                          <p:val>
+                                            <p:strVal val="-0.92*ppt_w"/>
+                                          </p:val>
+                                        </p:tav>
+                                        <p:tav tm="40000">
+                                          <p:val>
+                                            <p:strVal val="-ppt_w"/>
+                                          </p:val>
+                                        </p:tav>
+                                        <p:tav tm="45000">
+                                          <p:val>
+                                            <p:strVal val="-0.92*ppt_w"/>
+                                          </p:val>
+                                        </p:tav>
+                                        <p:tav tm="50000">
+                                          <p:val>
+                                            <p:strVal val="-0.71*ppt_w"/>
+                                          </p:val>
+                                        </p:tav>
+                                        <p:tav tm="55000">
+                                          <p:val>
+                                            <p:strVal val="-0.38*ppt_w"/>
+                                          </p:val>
+                                        </p:tav>
+                                        <p:tav tm="60000">
+                                          <p:val>
+                                            <p:fltVal val="0"/>
+                                          </p:val>
+                                        </p:tav>
+                                        <p:tav tm="65000">
+                                          <p:val>
+                                            <p:strVal val="0.38*ppt_w"/>
+                                          </p:val>
+                                        </p:tav>
+                                        <p:tav tm="70000">
+                                          <p:val>
+                                            <p:strVal val="0.71*ppt_w"/>
+                                          </p:val>
+                                        </p:tav>
+                                        <p:tav tm="75000">
+                                          <p:val>
+                                            <p:strVal val="0.92*ppt_w"/>
+                                          </p:val>
+                                        </p:tav>
+                                        <p:tav tm="80000">
+                                          <p:val>
+                                            <p:strVal val="ppt_w"/>
+                                          </p:val>
+                                        </p:tav>
+                                        <p:tav tm="85000">
+                                          <p:val>
+                                            <p:strVal val="0.92*ppt_w"/>
+                                          </p:val>
+                                        </p:tav>
+                                        <p:tav tm="90000">
+                                          <p:val>
+                                            <p:strVal val="0.71*ppt_w"/>
+                                          </p:val>
+                                        </p:tav>
+                                        <p:tav tm="95000">
+                                          <p:val>
+                                            <p:strVal val="0.38*ppt_w"/>
+                                          </p:val>
+                                        </p:tav>
+                                        <p:tav tm="100000">
+                                          <p:val>
+                                            <p:fltVal val="0"/>
+                                          </p:val>
+                                        </p:tav>
+                                      </p:tavLst>
+                                    </p:anim>
+                                    <p:anim calcmode="lin" valueType="num">
+                                      <p:cBhvr>
+                                        <p:cTn id="33" dur="1250"/>
+                                        <p:tgtEl>
+                                          <p:spTgt spid="6"/>
+                                        </p:tgtEl>
+                                        <p:attrNameLst>
+                                          <p:attrName>ppt_h</p:attrName>
+                                        </p:attrNameLst>
+                                      </p:cBhvr>
+                                      <p:tavLst>
+                                        <p:tav tm="0">
+                                          <p:val>
+                                            <p:strVal val="ppt_h"/>
+                                          </p:val>
+                                        </p:tav>
+                                        <p:tav tm="100000">
+                                          <p:val>
+                                            <p:strVal val="ppt_h"/>
+                                          </p:val>
+                                        </p:tav>
+                                      </p:tavLst>
+                                    </p:anim>
+                                    <p:set>
+                                      <p:cBhvr>
+                                        <p:cTn id="34" dur="1" fill="hold">
+                                          <p:stCondLst>
+                                            <p:cond delay="1249"/>
+                                          </p:stCondLst>
+                                        </p:cTn>
+                                        <p:tgtEl>
+                                          <p:spTgt spid="6"/>
+                                        </p:tgtEl>
+                                        <p:attrNameLst>
+                                          <p:attrName>style.visibility</p:attrName>
+                                        </p:attrNameLst>
+                                      </p:cBhvr>
+                                      <p:to>
+                                        <p:strVal val="hidden"/>
+                                      </p:to>
+                                    </p:set>
+                                  </p:childTnLst>
+                                </p:cTn>
+                              </p:par>
+                            </p:childTnLst>
+                          </p:cTn>
+                        </p:par>
+                      </p:childTnLst>
+                    </p:cTn>
+                  </p:par>
+                </p:childTnLst>
+              </p:cTn>
+              <p:prevCondLst>
+                <p:cond evt="onPrev" delay="0">
+                  <p:tgtEl>
+                    <p:sldTgt/>
+                  </p:tgtEl>
+                </p:cond>
+              </p:prevCondLst>
+              <p:nextCondLst>
+                <p:cond evt="onNext" delay="0">
+                  <p:tgtEl>
+                    <p:sldTgt/>
+                  </p:tgtEl>
+                </p:cond>
+              </p:nextCondLst>
+            </p:seq>
+          </p:childTnLst>
+        </p:cTn>
+      </p:par>
+    </p:tnLst>
+  </p:timing>
 </p:sld>
 </file>
 
@@ -3990,31 +6305,44 @@
           </a:p>
         </p:txBody>
       </p:sp>
-      <p:sp>
-        <p:nvSpPr>
-          <p:cNvPr id="3" name="Espaço Reservado para Conteúdo 2">
+      <p:pic>
+        <p:nvPicPr>
+          <p:cNvPr id="14" name="Espaço Reservado para Conteúdo 13">
             <a:extLst>
               <a:ext uri="{FF2B5EF4-FFF2-40B4-BE49-F238E27FC236}">
-                <a16:creationId xmlns:a16="http://schemas.microsoft.com/office/drawing/2014/main" id="{93091A3F-3EBF-0D2D-74EE-56F01FD432CA}"/>
+                <a16:creationId xmlns:a16="http://schemas.microsoft.com/office/drawing/2014/main" id="{50840296-B32D-5436-702F-2BEFC175EDEA}"/>
               </a:ext>
             </a:extLst>
           </p:cNvPr>
-          <p:cNvSpPr>
-            <a:spLocks noGrp="1"/>
-          </p:cNvSpPr>
+          <p:cNvPicPr>
+            <a:picLocks noGrp="1" noChangeAspect="1"/>
+          </p:cNvPicPr>
           <p:nvPr>
             <p:ph idx="1"/>
           </p:nvPr>
-        </p:nvSpPr>
-        <p:spPr/>
-        <p:txBody>
-          <a:bodyPr/>
-          <a:lstStyle/>
-          <a:p>
-            <a:endParaRPr lang="pt-BR"/>
-          </a:p>
-        </p:txBody>
-      </p:sp>
+        </p:nvPicPr>
+        <p:blipFill>
+          <a:blip r:embed="rId2">
+            <a:extLst>
+              <a:ext uri="{28A0092B-C50C-407E-A947-70E740481C1C}">
+                <a14:useLocalDpi xmlns:a14="http://schemas.microsoft.com/office/drawing/2010/main" val="0"/>
+              </a:ext>
+            </a:extLst>
+          </a:blip>
+          <a:stretch>
+            <a:fillRect/>
+          </a:stretch>
+        </p:blipFill>
+        <p:spPr>
+          <a:xfrm>
+            <a:off x="2657824" y="382588"/>
+            <a:ext cx="1883664" cy="914400"/>
+          </a:xfrm>
+          <a:prstGeom prst="rect">
+            <a:avLst/>
+          </a:prstGeom>
+        </p:spPr>
+      </p:pic>
       <p:sp>
         <p:nvSpPr>
           <p:cNvPr id="5" name="Retângulo 4">
@@ -4088,7 +6416,7 @@
           <p:nvPr/>
         </p:nvPicPr>
         <p:blipFill>
-          <a:blip r:embed="rId2"/>
+          <a:blip r:embed="rId3"/>
           <a:stretch>
             <a:fillRect/>
           </a:stretch>
@@ -4103,36 +6431,67 @@
           </a:prstGeom>
         </p:spPr>
       </p:pic>
-      <p:sp>
-        <p:nvSpPr>
-          <p:cNvPr id="11" name="CaixaDeTexto 10">
+      <p:grpSp>
+        <p:nvGrpSpPr>
+          <p:cNvPr id="20" name="Agrupar 19">
             <a:extLst>
               <a:ext uri="{FF2B5EF4-FFF2-40B4-BE49-F238E27FC236}">
-                <a16:creationId xmlns:a16="http://schemas.microsoft.com/office/drawing/2014/main" id="{483DE521-CA67-B958-B817-35E3C493F7CB}"/>
+                <a16:creationId xmlns:a16="http://schemas.microsoft.com/office/drawing/2014/main" id="{C75DA21A-4D54-1D38-C0E4-83368A574B9D}"/>
               </a:ext>
             </a:extLst>
           </p:cNvPr>
-          <p:cNvSpPr txBox="1"/>
+          <p:cNvGrpSpPr/>
           <p:nvPr/>
-        </p:nvSpPr>
-        <p:spPr>
+        </p:nvGrpSpPr>
+        <p:grpSpPr>
           <a:xfrm>
-            <a:off x="2569076" y="72836"/>
-            <a:ext cx="752475" cy="307777"/>
+            <a:off x="2782933" y="39640"/>
+            <a:ext cx="1931486" cy="1285048"/>
+            <a:chOff x="2569076" y="72836"/>
+            <a:chExt cx="1931486" cy="1285048"/>
           </a:xfrm>
-          <a:prstGeom prst="rect">
-            <a:avLst/>
-          </a:prstGeom>
-          <a:noFill/>
-        </p:spPr>
-        <p:txBody>
-          <a:bodyPr wrap="square" rtlCol="0">
-            <a:spAutoFit/>
-          </a:bodyPr>
-          <a:lstStyle/>
-          <a:p>
-            <a:r>
-              <a:rPr lang="pt-BR" sz="1400" b="1" dirty="0">
+        </p:grpSpPr>
+        <p:sp>
+          <p:nvSpPr>
+            <p:cNvPr id="11" name="CaixaDeTexto 10">
+              <a:extLst>
+                <a:ext uri="{FF2B5EF4-FFF2-40B4-BE49-F238E27FC236}">
+                  <a16:creationId xmlns:a16="http://schemas.microsoft.com/office/drawing/2014/main" id="{483DE521-CA67-B958-B817-35E3C493F7CB}"/>
+                </a:ext>
+              </a:extLst>
+            </p:cNvPr>
+            <p:cNvSpPr txBox="1"/>
+            <p:nvPr/>
+          </p:nvSpPr>
+          <p:spPr>
+            <a:xfrm>
+              <a:off x="2569076" y="72836"/>
+              <a:ext cx="752475" cy="307777"/>
+            </a:xfrm>
+            <a:prstGeom prst="rect">
+              <a:avLst/>
+            </a:prstGeom>
+            <a:noFill/>
+          </p:spPr>
+          <p:txBody>
+            <a:bodyPr wrap="square" rtlCol="0">
+              <a:spAutoFit/>
+            </a:bodyPr>
+            <a:lstStyle/>
+            <a:p>
+              <a:r>
+                <a:rPr lang="pt-BR" sz="1400" b="1" dirty="0">
+                  <a:solidFill>
+                    <a:schemeClr val="bg1"/>
+                  </a:solidFill>
+                  <a:effectLst>
+                    <a:reflection blurRad="6350" stA="55000" endA="300" endPos="45500" dir="5400000" sy="-100000" algn="bl" rotWithShape="0"/>
+                  </a:effectLst>
+                  <a:latin typeface="Arial Rounded MT Bold" panose="020F0704030504030204" pitchFamily="34" charset="0"/>
+                </a:rPr>
+                <a:t>Pediu</a:t>
+              </a:r>
+              <a:endParaRPr lang="pt-BR" sz="2000" b="1" dirty="0">
                 <a:solidFill>
                   <a:schemeClr val="bg1"/>
                 </a:solidFill>
@@ -4140,51 +6499,51 @@
                   <a:reflection blurRad="6350" stA="55000" endA="300" endPos="45500" dir="5400000" sy="-100000" algn="bl" rotWithShape="0"/>
                 </a:effectLst>
                 <a:latin typeface="Arial Rounded MT Bold" panose="020F0704030504030204" pitchFamily="34" charset="0"/>
-              </a:rPr>
-              <a:t>Pediu</a:t>
-            </a:r>
-            <a:endParaRPr lang="pt-BR" sz="2000" b="1" dirty="0">
-              <a:solidFill>
-                <a:schemeClr val="bg1"/>
-              </a:solidFill>
-              <a:effectLst>
-                <a:reflection blurRad="6350" stA="55000" endA="300" endPos="45500" dir="5400000" sy="-100000" algn="bl" rotWithShape="0"/>
-              </a:effectLst>
-              <a:latin typeface="Arial Rounded MT Bold" panose="020F0704030504030204" pitchFamily="34" charset="0"/>
-            </a:endParaRPr>
-          </a:p>
-        </p:txBody>
-      </p:sp>
-      <p:sp>
-        <p:nvSpPr>
-          <p:cNvPr id="13" name="CaixaDeTexto 12">
-            <a:extLst>
-              <a:ext uri="{FF2B5EF4-FFF2-40B4-BE49-F238E27FC236}">
-                <a16:creationId xmlns:a16="http://schemas.microsoft.com/office/drawing/2014/main" id="{87D35BBE-EA18-5B7D-E4C7-56CC174DCDAF}"/>
-              </a:ext>
-            </a:extLst>
-          </p:cNvPr>
-          <p:cNvSpPr txBox="1"/>
-          <p:nvPr/>
-        </p:nvSpPr>
-        <p:spPr>
-          <a:xfrm>
-            <a:off x="2772496" y="261748"/>
-            <a:ext cx="1391373" cy="338554"/>
-          </a:xfrm>
-          <a:prstGeom prst="rect">
-            <a:avLst/>
-          </a:prstGeom>
-          <a:noFill/>
-        </p:spPr>
-        <p:txBody>
-          <a:bodyPr wrap="square" rtlCol="0">
-            <a:spAutoFit/>
-          </a:bodyPr>
-          <a:lstStyle/>
-          <a:p>
-            <a:r>
-              <a:rPr lang="pt-BR" sz="1600" dirty="0">
+              </a:endParaRPr>
+            </a:p>
+          </p:txBody>
+        </p:sp>
+        <p:sp>
+          <p:nvSpPr>
+            <p:cNvPr id="13" name="CaixaDeTexto 12">
+              <a:extLst>
+                <a:ext uri="{FF2B5EF4-FFF2-40B4-BE49-F238E27FC236}">
+                  <a16:creationId xmlns:a16="http://schemas.microsoft.com/office/drawing/2014/main" id="{87D35BBE-EA18-5B7D-E4C7-56CC174DCDAF}"/>
+                </a:ext>
+              </a:extLst>
+            </p:cNvPr>
+            <p:cNvSpPr txBox="1"/>
+            <p:nvPr/>
+          </p:nvSpPr>
+          <p:spPr>
+            <a:xfrm>
+              <a:off x="2772496" y="261748"/>
+              <a:ext cx="1391373" cy="338554"/>
+            </a:xfrm>
+            <a:prstGeom prst="rect">
+              <a:avLst/>
+            </a:prstGeom>
+            <a:noFill/>
+          </p:spPr>
+          <p:txBody>
+            <a:bodyPr wrap="square" rtlCol="0">
+              <a:spAutoFit/>
+            </a:bodyPr>
+            <a:lstStyle/>
+            <a:p>
+              <a:r>
+                <a:rPr lang="pt-BR" sz="1600" dirty="0">
+                  <a:solidFill>
+                    <a:schemeClr val="bg1"/>
+                  </a:solidFill>
+                  <a:effectLst>
+                    <a:reflection blurRad="6350" stA="55000" endA="300" endPos="45500" dir="5400000" sy="-100000" algn="bl" rotWithShape="0"/>
+                  </a:effectLst>
+                  <a:latin typeface="Arial Rounded MT Bold" panose="020F0704030504030204" pitchFamily="34" charset="0"/>
+                </a:rPr>
+                <a:t>Cantando</a:t>
+              </a:r>
+              <a:endParaRPr lang="pt-BR" dirty="0">
                 <a:solidFill>
                   <a:schemeClr val="bg1"/>
                 </a:solidFill>
@@ -4192,51 +6551,94 @@
                   <a:reflection blurRad="6350" stA="55000" endA="300" endPos="45500" dir="5400000" sy="-100000" algn="bl" rotWithShape="0"/>
                 </a:effectLst>
                 <a:latin typeface="Arial Rounded MT Bold" panose="020F0704030504030204" pitchFamily="34" charset="0"/>
-              </a:rPr>
-              <a:t>Cantando</a:t>
-            </a:r>
-            <a:endParaRPr lang="pt-BR" dirty="0">
-              <a:solidFill>
-                <a:schemeClr val="bg1"/>
-              </a:solidFill>
-              <a:effectLst>
-                <a:reflection blurRad="6350" stA="55000" endA="300" endPos="45500" dir="5400000" sy="-100000" algn="bl" rotWithShape="0"/>
-              </a:effectLst>
-              <a:latin typeface="Arial Rounded MT Bold" panose="020F0704030504030204" pitchFamily="34" charset="0"/>
-            </a:endParaRPr>
-          </a:p>
-        </p:txBody>
-      </p:sp>
-      <p:sp>
-        <p:nvSpPr>
-          <p:cNvPr id="15" name="CaixaDeTexto 14">
-            <a:extLst>
-              <a:ext uri="{FF2B5EF4-FFF2-40B4-BE49-F238E27FC236}">
-                <a16:creationId xmlns:a16="http://schemas.microsoft.com/office/drawing/2014/main" id="{14D1AA3D-EDD4-0A50-2829-E73CE10B3425}"/>
-              </a:ext>
-            </a:extLst>
-          </p:cNvPr>
-          <p:cNvSpPr txBox="1"/>
-          <p:nvPr/>
-        </p:nvSpPr>
-        <p:spPr>
-          <a:xfrm>
-            <a:off x="2603705" y="466690"/>
-            <a:ext cx="738188" cy="338554"/>
-          </a:xfrm>
-          <a:prstGeom prst="rect">
-            <a:avLst/>
-          </a:prstGeom>
-          <a:noFill/>
-        </p:spPr>
-        <p:txBody>
-          <a:bodyPr wrap="square" rtlCol="0">
-            <a:spAutoFit/>
-          </a:bodyPr>
-          <a:lstStyle/>
-          <a:p>
-            <a:r>
-              <a:rPr lang="pt-BR" sz="1600" dirty="0">
+              </a:endParaRPr>
+            </a:p>
+          </p:txBody>
+        </p:sp>
+        <p:sp>
+          <p:nvSpPr>
+            <p:cNvPr id="15" name="CaixaDeTexto 14">
+              <a:extLst>
+                <a:ext uri="{FF2B5EF4-FFF2-40B4-BE49-F238E27FC236}">
+                  <a16:creationId xmlns:a16="http://schemas.microsoft.com/office/drawing/2014/main" id="{14D1AA3D-EDD4-0A50-2829-E73CE10B3425}"/>
+                </a:ext>
+              </a:extLst>
+            </p:cNvPr>
+            <p:cNvSpPr txBox="1"/>
+            <p:nvPr/>
+          </p:nvSpPr>
+          <p:spPr>
+            <a:xfrm>
+              <a:off x="2603705" y="466690"/>
+              <a:ext cx="738188" cy="338554"/>
+            </a:xfrm>
+            <a:prstGeom prst="rect">
+              <a:avLst/>
+            </a:prstGeom>
+            <a:noFill/>
+          </p:spPr>
+          <p:txBody>
+            <a:bodyPr wrap="square" rtlCol="0">
+              <a:spAutoFit/>
+            </a:bodyPr>
+            <a:lstStyle/>
+            <a:p>
+              <a:r>
+                <a:rPr lang="pt-BR" sz="1600" dirty="0">
+                  <a:solidFill>
+                    <a:schemeClr val="bg1"/>
+                  </a:solidFill>
+                  <a:effectLst>
+                    <a:reflection blurRad="6350" stA="55000" endA="300" endPos="45500" dir="5400000" sy="-100000" algn="bl" rotWithShape="0"/>
+                  </a:effectLst>
+                  <a:latin typeface="Arial Rounded MT Bold" panose="020F0704030504030204" pitchFamily="34" charset="0"/>
+                </a:rPr>
+                <a:t>Saiu</a:t>
+              </a:r>
+            </a:p>
+          </p:txBody>
+        </p:sp>
+        <p:sp>
+          <p:nvSpPr>
+            <p:cNvPr id="17" name="CaixaDeTexto 16">
+              <a:extLst>
+                <a:ext uri="{FF2B5EF4-FFF2-40B4-BE49-F238E27FC236}">
+                  <a16:creationId xmlns:a16="http://schemas.microsoft.com/office/drawing/2014/main" id="{5E569279-26DB-F2B5-A23B-9257CF32660D}"/>
+                </a:ext>
+              </a:extLst>
+            </p:cNvPr>
+            <p:cNvSpPr txBox="1"/>
+            <p:nvPr/>
+          </p:nvSpPr>
+          <p:spPr>
+            <a:xfrm>
+              <a:off x="2794288" y="683600"/>
+              <a:ext cx="1347787" cy="338554"/>
+            </a:xfrm>
+            <a:prstGeom prst="rect">
+              <a:avLst/>
+            </a:prstGeom>
+            <a:noFill/>
+          </p:spPr>
+          <p:txBody>
+            <a:bodyPr wrap="square" rtlCol="0">
+              <a:spAutoFit/>
+            </a:bodyPr>
+            <a:lstStyle/>
+            <a:p>
+              <a:r>
+                <a:rPr lang="pt-BR" sz="1600" dirty="0">
+                  <a:solidFill>
+                    <a:schemeClr val="bg1"/>
+                  </a:solidFill>
+                  <a:effectLst>
+                    <a:reflection blurRad="6350" stA="55000" endA="300" endPos="45500" dir="5400000" sy="-100000" algn="bl" rotWithShape="0"/>
+                  </a:effectLst>
+                  <a:latin typeface="Arial Rounded MT Bold" panose="020F0704030504030204" pitchFamily="34" charset="0"/>
+                </a:rPr>
+                <a:t>Ganhando</a:t>
+              </a:r>
+              <a:endParaRPr lang="pt-BR" dirty="0">
                 <a:solidFill>
                   <a:schemeClr val="bg1"/>
                 </a:solidFill>
@@ -4244,110 +6646,154 @@
                   <a:reflection blurRad="6350" stA="55000" endA="300" endPos="45500" dir="5400000" sy="-100000" algn="bl" rotWithShape="0"/>
                 </a:effectLst>
                 <a:latin typeface="Arial Rounded MT Bold" panose="020F0704030504030204" pitchFamily="34" charset="0"/>
-              </a:rPr>
-              <a:t>Saiu</a:t>
-            </a:r>
-          </a:p>
-        </p:txBody>
-      </p:sp>
-      <p:sp>
-        <p:nvSpPr>
-          <p:cNvPr id="17" name="CaixaDeTexto 16">
+              </a:endParaRPr>
+            </a:p>
+          </p:txBody>
+        </p:sp>
+        <p:sp>
+          <p:nvSpPr>
+            <p:cNvPr id="19" name="CaixaDeTexto 18">
+              <a:extLst>
+                <a:ext uri="{FF2B5EF4-FFF2-40B4-BE49-F238E27FC236}">
+                  <a16:creationId xmlns:a16="http://schemas.microsoft.com/office/drawing/2014/main" id="{DD9406EC-3B02-91E5-0DFD-D85A0496683B}"/>
+                </a:ext>
+              </a:extLst>
+            </p:cNvPr>
+            <p:cNvSpPr txBox="1"/>
+            <p:nvPr/>
+          </p:nvSpPr>
+          <p:spPr>
+            <a:xfrm>
+              <a:off x="2647949" y="988552"/>
+              <a:ext cx="1852613" cy="369332"/>
+            </a:xfrm>
+            <a:prstGeom prst="rect">
+              <a:avLst/>
+            </a:prstGeom>
+            <a:noFill/>
+          </p:spPr>
+          <p:txBody>
+            <a:bodyPr wrap="square" rtlCol="0">
+              <a:spAutoFit/>
+            </a:bodyPr>
+            <a:lstStyle/>
+            <a:p>
+              <a:r>
+                <a:rPr lang="pt-BR" dirty="0">
+                  <a:solidFill>
+                    <a:schemeClr val="bg1"/>
+                  </a:solidFill>
+                  <a:latin typeface="Arial Rounded MT Bold" panose="020F0704030504030204" pitchFamily="34" charset="0"/>
+                </a:rPr>
+                <a:t>No drive-tudo</a:t>
+              </a:r>
+            </a:p>
+          </p:txBody>
+        </p:sp>
+      </p:grpSp>
+      <p:grpSp>
+        <p:nvGrpSpPr>
+          <p:cNvPr id="23" name="Agrupar 22">
             <a:extLst>
               <a:ext uri="{FF2B5EF4-FFF2-40B4-BE49-F238E27FC236}">
-                <a16:creationId xmlns:a16="http://schemas.microsoft.com/office/drawing/2014/main" id="{5E569279-26DB-F2B5-A23B-9257CF32660D}"/>
+                <a16:creationId xmlns:a16="http://schemas.microsoft.com/office/drawing/2014/main" id="{D044D756-C50D-C3CC-3CCB-4DFD2A9F98AC}"/>
               </a:ext>
             </a:extLst>
           </p:cNvPr>
-          <p:cNvSpPr txBox="1"/>
+          <p:cNvGrpSpPr/>
           <p:nvPr/>
-        </p:nvSpPr>
-        <p:spPr>
+        </p:nvGrpSpPr>
+        <p:grpSpPr>
           <a:xfrm>
-            <a:off x="2794288" y="683600"/>
-            <a:ext cx="1347787" cy="338554"/>
+            <a:off x="-14740" y="4394"/>
+            <a:ext cx="2802799" cy="1485100"/>
+            <a:chOff x="-19866" y="4394"/>
+            <a:chExt cx="2802799" cy="1485100"/>
           </a:xfrm>
-          <a:prstGeom prst="rect">
-            <a:avLst/>
-          </a:prstGeom>
-          <a:noFill/>
-        </p:spPr>
-        <p:txBody>
-          <a:bodyPr wrap="square" rtlCol="0">
-            <a:spAutoFit/>
-          </a:bodyPr>
-          <a:lstStyle/>
-          <a:p>
-            <a:r>
-              <a:rPr lang="pt-BR" sz="1600" dirty="0">
-                <a:solidFill>
-                  <a:schemeClr val="bg1"/>
-                </a:solidFill>
-                <a:effectLst>
-                  <a:reflection blurRad="6350" stA="55000" endA="300" endPos="45500" dir="5400000" sy="-100000" algn="bl" rotWithShape="0"/>
-                </a:effectLst>
-                <a:latin typeface="Arial Rounded MT Bold" panose="020F0704030504030204" pitchFamily="34" charset="0"/>
-              </a:rPr>
-              <a:t>Ganhando</a:t>
-            </a:r>
-            <a:endParaRPr lang="pt-BR" dirty="0">
-              <a:solidFill>
-                <a:schemeClr val="bg1"/>
-              </a:solidFill>
-              <a:effectLst>
-                <a:reflection blurRad="6350" stA="55000" endA="300" endPos="45500" dir="5400000" sy="-100000" algn="bl" rotWithShape="0"/>
-              </a:effectLst>
-              <a:latin typeface="Arial Rounded MT Bold" panose="020F0704030504030204" pitchFamily="34" charset="0"/>
-            </a:endParaRPr>
-          </a:p>
-        </p:txBody>
-      </p:sp>
-      <p:sp>
-        <p:nvSpPr>
-          <p:cNvPr id="19" name="CaixaDeTexto 18">
+        </p:grpSpPr>
+        <p:pic>
+          <p:nvPicPr>
+            <p:cNvPr id="18" name="Imagem 17">
+              <a:extLst>
+                <a:ext uri="{FF2B5EF4-FFF2-40B4-BE49-F238E27FC236}">
+                  <a16:creationId xmlns:a16="http://schemas.microsoft.com/office/drawing/2014/main" id="{A5A2047D-5255-97BE-9D7C-D2109E5F27FA}"/>
+                </a:ext>
+              </a:extLst>
+            </p:cNvPr>
+            <p:cNvPicPr>
+              <a:picLocks noChangeAspect="1"/>
+            </p:cNvPicPr>
+            <p:nvPr/>
+          </p:nvPicPr>
+          <p:blipFill>
+            <a:blip r:embed="rId2">
+              <a:extLst>
+                <a:ext uri="{28A0092B-C50C-407E-A947-70E740481C1C}">
+                  <a14:useLocalDpi xmlns:a14="http://schemas.microsoft.com/office/drawing/2010/main" val="0"/>
+                </a:ext>
+              </a:extLst>
+            </a:blip>
+            <a:stretch>
+              <a:fillRect/>
+            </a:stretch>
+          </p:blipFill>
+          <p:spPr>
+            <a:xfrm>
+              <a:off x="-19866" y="128912"/>
+              <a:ext cx="2802799" cy="1360582"/>
+            </a:xfrm>
+            <a:prstGeom prst="rect">
+              <a:avLst/>
+            </a:prstGeom>
+          </p:spPr>
+        </p:pic>
+        <p:sp>
+          <p:nvSpPr>
+            <p:cNvPr id="22" name="CaixaDeTexto 21">
+              <a:extLst>
+                <a:ext uri="{FF2B5EF4-FFF2-40B4-BE49-F238E27FC236}">
+                  <a16:creationId xmlns:a16="http://schemas.microsoft.com/office/drawing/2014/main" id="{4E7FCDEB-05E5-F71C-5422-5695EAFE9E7B}"/>
+                </a:ext>
+              </a:extLst>
+            </p:cNvPr>
+            <p:cNvSpPr txBox="1"/>
+            <p:nvPr/>
+          </p:nvSpPr>
+          <p:spPr>
+            <a:xfrm>
+              <a:off x="223150" y="4394"/>
+              <a:ext cx="2548910" cy="338554"/>
+            </a:xfrm>
+            <a:prstGeom prst="rect">
+              <a:avLst/>
+            </a:prstGeom>
+            <a:noFill/>
+          </p:spPr>
+          <p:txBody>
+            <a:bodyPr wrap="square" rtlCol="0">
+              <a:spAutoFit/>
+            </a:bodyPr>
+            <a:lstStyle/>
+            <a:p>
+              <a:r>
+                <a:rPr lang="pt-BR" sz="1600" dirty="0">
+                  <a:solidFill>
+                    <a:srgbClr val="FF0000"/>
+                  </a:solidFill>
+                  <a:latin typeface="Arial Rounded MT Bold" panose="020F0704030504030204" pitchFamily="34" charset="0"/>
+                </a:rPr>
+                <a:t>Méqui Box  4 Pessoas</a:t>
+              </a:r>
+            </a:p>
+          </p:txBody>
+        </p:sp>
+      </p:grpSp>
+      <p:pic>
+        <p:nvPicPr>
+          <p:cNvPr id="25" name="Imagem 24">
             <a:extLst>
               <a:ext uri="{FF2B5EF4-FFF2-40B4-BE49-F238E27FC236}">
-                <a16:creationId xmlns:a16="http://schemas.microsoft.com/office/drawing/2014/main" id="{DD9406EC-3B02-91E5-0DFD-D85A0496683B}"/>
-              </a:ext>
-            </a:extLst>
-          </p:cNvPr>
-          <p:cNvSpPr txBox="1"/>
-          <p:nvPr/>
-        </p:nvSpPr>
-        <p:spPr>
-          <a:xfrm>
-            <a:off x="2647949" y="988552"/>
-            <a:ext cx="1852613" cy="369332"/>
-          </a:xfrm>
-          <a:prstGeom prst="rect">
-            <a:avLst/>
-          </a:prstGeom>
-          <a:noFill/>
-        </p:spPr>
-        <p:txBody>
-          <a:bodyPr wrap="square" rtlCol="0">
-            <a:spAutoFit/>
-          </a:bodyPr>
-          <a:lstStyle/>
-          <a:p>
-            <a:r>
-              <a:rPr lang="pt-BR" dirty="0">
-                <a:solidFill>
-                  <a:schemeClr val="bg1"/>
-                </a:solidFill>
-                <a:latin typeface="Arial Rounded MT Bold" panose="020F0704030504030204" pitchFamily="34" charset="0"/>
-              </a:rPr>
-              <a:t>No drive-tudo</a:t>
-            </a:r>
-          </a:p>
-        </p:txBody>
-      </p:sp>
-      <p:pic>
-        <p:nvPicPr>
-          <p:cNvPr id="21" name="Imagem 20">
-            <a:extLst>
-              <a:ext uri="{FF2B5EF4-FFF2-40B4-BE49-F238E27FC236}">
-                <a16:creationId xmlns:a16="http://schemas.microsoft.com/office/drawing/2014/main" id="{FBBF4AFB-B31A-B683-237D-25517B49FB5C}"/>
+                <a16:creationId xmlns:a16="http://schemas.microsoft.com/office/drawing/2014/main" id="{DD1745DA-A525-2ED4-8EAD-02409DF29162}"/>
               </a:ext>
             </a:extLst>
           </p:cNvPr>
@@ -4357,21 +6803,22 @@
           <p:nvPr/>
         </p:nvPicPr>
         <p:blipFill>
-          <a:blip r:embed="rId3">
+          <a:blip r:embed="rId4">
             <a:extLst>
               <a:ext uri="{28A0092B-C50C-407E-A947-70E740481C1C}">
                 <a14:useLocalDpi xmlns:a14="http://schemas.microsoft.com/office/drawing/2010/main" val="0"/>
               </a:ext>
             </a:extLst>
           </a:blip>
+          <a:srcRect b="6451"/>
           <a:stretch>
             <a:fillRect/>
           </a:stretch>
         </p:blipFill>
         <p:spPr>
           <a:xfrm>
-            <a:off x="4848862" y="39639"/>
-            <a:ext cx="1164566" cy="1360582"/>
+            <a:off x="4913652" y="0"/>
+            <a:ext cx="1317408" cy="1439863"/>
           </a:xfrm>
           <a:prstGeom prst="rect">
             <a:avLst/>
@@ -4388,6 +6835,509 @@
   <p:clrMapOvr>
     <a:masterClrMapping/>
   </p:clrMapOvr>
+  <p:timing>
+    <p:tnLst>
+      <p:par>
+        <p:cTn id="1" dur="indefinite" restart="never" nodeType="tmRoot">
+          <p:childTnLst>
+            <p:seq concurrent="1" nextAc="seek">
+              <p:cTn id="2" dur="indefinite" nodeType="mainSeq">
+                <p:childTnLst>
+                  <p:par>
+                    <p:cTn id="3" fill="hold">
+                      <p:stCondLst>
+                        <p:cond delay="indefinite"/>
+                        <p:cond evt="onBegin" delay="0">
+                          <p:tn val="2"/>
+                        </p:cond>
+                      </p:stCondLst>
+                      <p:childTnLst>
+                        <p:par>
+                          <p:cTn id="4" fill="hold">
+                            <p:stCondLst>
+                              <p:cond delay="0"/>
+                            </p:stCondLst>
+                            <p:childTnLst>
+                              <p:par>
+                                <p:cTn id="5" presetID="6" presetClass="entr" presetSubtype="16" fill="hold" nodeType="withEffect">
+                                  <p:stCondLst>
+                                    <p:cond delay="0"/>
+                                  </p:stCondLst>
+                                  <p:childTnLst>
+                                    <p:set>
+                                      <p:cBhvr>
+                                        <p:cTn id="6" dur="1" fill="hold">
+                                          <p:stCondLst>
+                                            <p:cond delay="0"/>
+                                          </p:stCondLst>
+                                        </p:cTn>
+                                        <p:tgtEl>
+                                          <p:spTgt spid="23"/>
+                                        </p:tgtEl>
+                                        <p:attrNameLst>
+                                          <p:attrName>style.visibility</p:attrName>
+                                        </p:attrNameLst>
+                                      </p:cBhvr>
+                                      <p:to>
+                                        <p:strVal val="visible"/>
+                                      </p:to>
+                                    </p:set>
+                                    <p:animEffect transition="in" filter="circle(in)">
+                                      <p:cBhvr>
+                                        <p:cTn id="7" dur="2000"/>
+                                        <p:tgtEl>
+                                          <p:spTgt spid="23"/>
+                                        </p:tgtEl>
+                                      </p:cBhvr>
+                                    </p:animEffect>
+                                  </p:childTnLst>
+                                </p:cTn>
+                              </p:par>
+                              <p:par>
+                                <p:cTn id="8" presetID="45" presetClass="entr" presetSubtype="0" fill="hold" nodeType="withEffect">
+                                  <p:stCondLst>
+                                    <p:cond delay="2000"/>
+                                  </p:stCondLst>
+                                  <p:childTnLst>
+                                    <p:set>
+                                      <p:cBhvr>
+                                        <p:cTn id="9" dur="1" fill="hold">
+                                          <p:stCondLst>
+                                            <p:cond delay="0"/>
+                                          </p:stCondLst>
+                                        </p:cTn>
+                                        <p:tgtEl>
+                                          <p:spTgt spid="20"/>
+                                        </p:tgtEl>
+                                        <p:attrNameLst>
+                                          <p:attrName>style.visibility</p:attrName>
+                                        </p:attrNameLst>
+                                      </p:cBhvr>
+                                      <p:to>
+                                        <p:strVal val="visible"/>
+                                      </p:to>
+                                    </p:set>
+                                    <p:animEffect transition="in" filter="fade">
+                                      <p:cBhvr>
+                                        <p:cTn id="10" dur="1500"/>
+                                        <p:tgtEl>
+                                          <p:spTgt spid="20"/>
+                                        </p:tgtEl>
+                                      </p:cBhvr>
+                                    </p:animEffect>
+                                    <p:anim calcmode="lin" valueType="num">
+                                      <p:cBhvr>
+                                        <p:cTn id="11" dur="1500" fill="hold"/>
+                                        <p:tgtEl>
+                                          <p:spTgt spid="20"/>
+                                        </p:tgtEl>
+                                        <p:attrNameLst>
+                                          <p:attrName>ppt_w</p:attrName>
+                                        </p:attrNameLst>
+                                      </p:cBhvr>
+                                      <p:tavLst>
+                                        <p:tav tm="0" fmla="#ppt_w*sin(2.5*pi*$)">
+                                          <p:val>
+                                            <p:fltVal val="0"/>
+                                          </p:val>
+                                        </p:tav>
+                                        <p:tav tm="100000">
+                                          <p:val>
+                                            <p:fltVal val="1"/>
+                                          </p:val>
+                                        </p:tav>
+                                      </p:tavLst>
+                                    </p:anim>
+                                    <p:anim calcmode="lin" valueType="num">
+                                      <p:cBhvr>
+                                        <p:cTn id="12" dur="1500" fill="hold"/>
+                                        <p:tgtEl>
+                                          <p:spTgt spid="20"/>
+                                        </p:tgtEl>
+                                        <p:attrNameLst>
+                                          <p:attrName>ppt_h</p:attrName>
+                                        </p:attrNameLst>
+                                      </p:cBhvr>
+                                      <p:tavLst>
+                                        <p:tav tm="0">
+                                          <p:val>
+                                            <p:strVal val="#ppt_h"/>
+                                          </p:val>
+                                        </p:tav>
+                                        <p:tav tm="100000">
+                                          <p:val>
+                                            <p:strVal val="#ppt_h"/>
+                                          </p:val>
+                                        </p:tav>
+                                      </p:tavLst>
+                                    </p:anim>
+                                  </p:childTnLst>
+                                </p:cTn>
+                              </p:par>
+                              <p:par>
+                                <p:cTn id="13" presetID="45" presetClass="entr" presetSubtype="0" fill="hold" nodeType="withEffect">
+                                  <p:stCondLst>
+                                    <p:cond delay="3000"/>
+                                  </p:stCondLst>
+                                  <p:childTnLst>
+                                    <p:set>
+                                      <p:cBhvr>
+                                        <p:cTn id="14" dur="1" fill="hold">
+                                          <p:stCondLst>
+                                            <p:cond delay="0"/>
+                                          </p:stCondLst>
+                                        </p:cTn>
+                                        <p:tgtEl>
+                                          <p:spTgt spid="25"/>
+                                        </p:tgtEl>
+                                        <p:attrNameLst>
+                                          <p:attrName>style.visibility</p:attrName>
+                                        </p:attrNameLst>
+                                      </p:cBhvr>
+                                      <p:to>
+                                        <p:strVal val="visible"/>
+                                      </p:to>
+                                    </p:set>
+                                    <p:animEffect transition="in" filter="fade">
+                                      <p:cBhvr>
+                                        <p:cTn id="15" dur="1500"/>
+                                        <p:tgtEl>
+                                          <p:spTgt spid="25"/>
+                                        </p:tgtEl>
+                                      </p:cBhvr>
+                                    </p:animEffect>
+                                    <p:anim calcmode="lin" valueType="num">
+                                      <p:cBhvr>
+                                        <p:cTn id="16" dur="1500" fill="hold"/>
+                                        <p:tgtEl>
+                                          <p:spTgt spid="25"/>
+                                        </p:tgtEl>
+                                        <p:attrNameLst>
+                                          <p:attrName>ppt_w</p:attrName>
+                                        </p:attrNameLst>
+                                      </p:cBhvr>
+                                      <p:tavLst>
+                                        <p:tav tm="0" fmla="#ppt_w*sin(2.5*pi*$)">
+                                          <p:val>
+                                            <p:fltVal val="0"/>
+                                          </p:val>
+                                        </p:tav>
+                                        <p:tav tm="100000">
+                                          <p:val>
+                                            <p:fltVal val="1"/>
+                                          </p:val>
+                                        </p:tav>
+                                      </p:tavLst>
+                                    </p:anim>
+                                    <p:anim calcmode="lin" valueType="num">
+                                      <p:cBhvr>
+                                        <p:cTn id="17" dur="1500" fill="hold"/>
+                                        <p:tgtEl>
+                                          <p:spTgt spid="25"/>
+                                        </p:tgtEl>
+                                        <p:attrNameLst>
+                                          <p:attrName>ppt_h</p:attrName>
+                                        </p:attrNameLst>
+                                      </p:cBhvr>
+                                      <p:tavLst>
+                                        <p:tav tm="0">
+                                          <p:val>
+                                            <p:strVal val="#ppt_h"/>
+                                          </p:val>
+                                        </p:tav>
+                                        <p:tav tm="100000">
+                                          <p:val>
+                                            <p:strVal val="#ppt_h"/>
+                                          </p:val>
+                                        </p:tav>
+                                      </p:tavLst>
+                                    </p:anim>
+                                  </p:childTnLst>
+                                </p:cTn>
+                              </p:par>
+                            </p:childTnLst>
+                          </p:cTn>
+                        </p:par>
+                        <p:par>
+                          <p:cTn id="18" fill="hold">
+                            <p:stCondLst>
+                              <p:cond delay="4500"/>
+                            </p:stCondLst>
+                            <p:childTnLst>
+                              <p:par>
+                                <p:cTn id="19" presetID="45" presetClass="exit" presetSubtype="0" fill="hold" nodeType="afterEffect">
+                                  <p:stCondLst>
+                                    <p:cond delay="6000"/>
+                                  </p:stCondLst>
+                                  <p:childTnLst>
+                                    <p:animEffect transition="out" filter="fade">
+                                      <p:cBhvr>
+                                        <p:cTn id="20" dur="2000"/>
+                                        <p:tgtEl>
+                                          <p:spTgt spid="23"/>
+                                        </p:tgtEl>
+                                      </p:cBhvr>
+                                    </p:animEffect>
+                                    <p:anim calcmode="lin" valueType="num">
+                                      <p:cBhvr>
+                                        <p:cTn id="21" dur="2000"/>
+                                        <p:tgtEl>
+                                          <p:spTgt spid="23"/>
+                                        </p:tgtEl>
+                                        <p:attrNameLst>
+                                          <p:attrName>ppt_w</p:attrName>
+                                        </p:attrNameLst>
+                                      </p:cBhvr>
+                                      <p:tavLst>
+                                        <p:tav tm="0">
+                                          <p:val>
+                                            <p:strVal val="ppt_w"/>
+                                          </p:val>
+                                        </p:tav>
+                                        <p:tav tm="5000">
+                                          <p:val>
+                                            <p:strVal val="0.92*ppt_w"/>
+                                          </p:val>
+                                        </p:tav>
+                                        <p:tav tm="10000">
+                                          <p:val>
+                                            <p:strVal val="0.71*ppt_w"/>
+                                          </p:val>
+                                        </p:tav>
+                                        <p:tav tm="15000">
+                                          <p:val>
+                                            <p:strVal val="0.38*ppt_w"/>
+                                          </p:val>
+                                        </p:tav>
+                                        <p:tav tm="20000">
+                                          <p:val>
+                                            <p:fltVal val="0"/>
+                                          </p:val>
+                                        </p:tav>
+                                        <p:tav tm="25000">
+                                          <p:val>
+                                            <p:strVal val="-0.38*ppt_w"/>
+                                          </p:val>
+                                        </p:tav>
+                                        <p:tav tm="30000">
+                                          <p:val>
+                                            <p:strVal val="-0.71*ppt_w"/>
+                                          </p:val>
+                                        </p:tav>
+                                        <p:tav tm="35000">
+                                          <p:val>
+                                            <p:strVal val="-0.92*ppt_w"/>
+                                          </p:val>
+                                        </p:tav>
+                                        <p:tav tm="40000">
+                                          <p:val>
+                                            <p:strVal val="-ppt_w"/>
+                                          </p:val>
+                                        </p:tav>
+                                        <p:tav tm="45000">
+                                          <p:val>
+                                            <p:strVal val="-0.92*ppt_w"/>
+                                          </p:val>
+                                        </p:tav>
+                                        <p:tav tm="50000">
+                                          <p:val>
+                                            <p:strVal val="-0.71*ppt_w"/>
+                                          </p:val>
+                                        </p:tav>
+                                        <p:tav tm="55000">
+                                          <p:val>
+                                            <p:strVal val="-0.38*ppt_w"/>
+                                          </p:val>
+                                        </p:tav>
+                                        <p:tav tm="60000">
+                                          <p:val>
+                                            <p:fltVal val="0"/>
+                                          </p:val>
+                                        </p:tav>
+                                        <p:tav tm="65000">
+                                          <p:val>
+                                            <p:strVal val="0.38*ppt_w"/>
+                                          </p:val>
+                                        </p:tav>
+                                        <p:tav tm="70000">
+                                          <p:val>
+                                            <p:strVal val="0.71*ppt_w"/>
+                                          </p:val>
+                                        </p:tav>
+                                        <p:tav tm="75000">
+                                          <p:val>
+                                            <p:strVal val="0.92*ppt_w"/>
+                                          </p:val>
+                                        </p:tav>
+                                        <p:tav tm="80000">
+                                          <p:val>
+                                            <p:strVal val="ppt_w"/>
+                                          </p:val>
+                                        </p:tav>
+                                        <p:tav tm="85000">
+                                          <p:val>
+                                            <p:strVal val="0.92*ppt_w"/>
+                                          </p:val>
+                                        </p:tav>
+                                        <p:tav tm="90000">
+                                          <p:val>
+                                            <p:strVal val="0.71*ppt_w"/>
+                                          </p:val>
+                                        </p:tav>
+                                        <p:tav tm="95000">
+                                          <p:val>
+                                            <p:strVal val="0.38*ppt_w"/>
+                                          </p:val>
+                                        </p:tav>
+                                        <p:tav tm="100000">
+                                          <p:val>
+                                            <p:fltVal val="0"/>
+                                          </p:val>
+                                        </p:tav>
+                                      </p:tavLst>
+                                    </p:anim>
+                                    <p:anim calcmode="lin" valueType="num">
+                                      <p:cBhvr>
+                                        <p:cTn id="22" dur="2000"/>
+                                        <p:tgtEl>
+                                          <p:spTgt spid="23"/>
+                                        </p:tgtEl>
+                                        <p:attrNameLst>
+                                          <p:attrName>ppt_h</p:attrName>
+                                        </p:attrNameLst>
+                                      </p:cBhvr>
+                                      <p:tavLst>
+                                        <p:tav tm="0">
+                                          <p:val>
+                                            <p:strVal val="ppt_h"/>
+                                          </p:val>
+                                        </p:tav>
+                                        <p:tav tm="100000">
+                                          <p:val>
+                                            <p:strVal val="ppt_h"/>
+                                          </p:val>
+                                        </p:tav>
+                                      </p:tavLst>
+                                    </p:anim>
+                                    <p:set>
+                                      <p:cBhvr>
+                                        <p:cTn id="23" dur="1" fill="hold">
+                                          <p:stCondLst>
+                                            <p:cond delay="1999"/>
+                                          </p:stCondLst>
+                                        </p:cTn>
+                                        <p:tgtEl>
+                                          <p:spTgt spid="23"/>
+                                        </p:tgtEl>
+                                        <p:attrNameLst>
+                                          <p:attrName>style.visibility</p:attrName>
+                                        </p:attrNameLst>
+                                      </p:cBhvr>
+                                      <p:to>
+                                        <p:strVal val="hidden"/>
+                                      </p:to>
+                                    </p:set>
+                                  </p:childTnLst>
+                                </p:cTn>
+                              </p:par>
+                              <p:par>
+                                <p:cTn id="24" presetID="10" presetClass="exit" presetSubtype="0" fill="hold" nodeType="withEffect">
+                                  <p:stCondLst>
+                                    <p:cond delay="6000"/>
+                                  </p:stCondLst>
+                                  <p:childTnLst>
+                                    <p:animEffect transition="out" filter="fade">
+                                      <p:cBhvr>
+                                        <p:cTn id="25" dur="1500"/>
+                                        <p:tgtEl>
+                                          <p:spTgt spid="20"/>
+                                        </p:tgtEl>
+                                      </p:cBhvr>
+                                    </p:animEffect>
+                                    <p:set>
+                                      <p:cBhvr>
+                                        <p:cTn id="26" dur="1" fill="hold">
+                                          <p:stCondLst>
+                                            <p:cond delay="1499"/>
+                                          </p:stCondLst>
+                                        </p:cTn>
+                                        <p:tgtEl>
+                                          <p:spTgt spid="20"/>
+                                        </p:tgtEl>
+                                        <p:attrNameLst>
+                                          <p:attrName>style.visibility</p:attrName>
+                                        </p:attrNameLst>
+                                      </p:cBhvr>
+                                      <p:to>
+                                        <p:strVal val="hidden"/>
+                                      </p:to>
+                                    </p:set>
+                                  </p:childTnLst>
+                                </p:cTn>
+                              </p:par>
+                              <p:par>
+                                <p:cTn id="27" presetID="10" presetClass="exit" presetSubtype="0" fill="hold" nodeType="withEffect">
+                                  <p:stCondLst>
+                                    <p:cond delay="6000"/>
+                                  </p:stCondLst>
+                                  <p:childTnLst>
+                                    <p:animEffect transition="out" filter="fade">
+                                      <p:cBhvr>
+                                        <p:cTn id="28" dur="1500"/>
+                                        <p:tgtEl>
+                                          <p:spTgt spid="25"/>
+                                        </p:tgtEl>
+                                      </p:cBhvr>
+                                    </p:animEffect>
+                                    <p:set>
+                                      <p:cBhvr>
+                                        <p:cTn id="29" dur="1" fill="hold">
+                                          <p:stCondLst>
+                                            <p:cond delay="1499"/>
+                                          </p:stCondLst>
+                                        </p:cTn>
+                                        <p:tgtEl>
+                                          <p:spTgt spid="25"/>
+                                        </p:tgtEl>
+                                        <p:attrNameLst>
+                                          <p:attrName>style.visibility</p:attrName>
+                                        </p:attrNameLst>
+                                      </p:cBhvr>
+                                      <p:to>
+                                        <p:strVal val="hidden"/>
+                                      </p:to>
+                                    </p:set>
+                                  </p:childTnLst>
+                                </p:cTn>
+                              </p:par>
+                            </p:childTnLst>
+                          </p:cTn>
+                        </p:par>
+                      </p:childTnLst>
+                    </p:cTn>
+                  </p:par>
+                </p:childTnLst>
+              </p:cTn>
+              <p:prevCondLst>
+                <p:cond evt="onPrev" delay="0">
+                  <p:tgtEl>
+                    <p:sldTgt/>
+                  </p:tgtEl>
+                </p:cond>
+              </p:prevCondLst>
+              <p:nextCondLst>
+                <p:cond evt="onNext" delay="0">
+                  <p:tgtEl>
+                    <p:sldTgt/>
+                  </p:tgtEl>
+                </p:cond>
+              </p:nextCondLst>
+            </p:seq>
+          </p:childTnLst>
+        </p:cTn>
+      </p:par>
+    </p:tnLst>
+  </p:timing>
 </p:sld>
 </file>
 
